--- a/icon.pptx
+++ b/icon.pptx
@@ -6,6 +6,8 @@
   </p:sldMasterIdLst>
   <p:sldIdLst>
     <p:sldId id="256" r:id="rId2"/>
+    <p:sldId id="257" r:id="rId3"/>
+    <p:sldId id="258" r:id="rId4"/>
   </p:sldIdLst>
   <p:sldSz cx="4873625" cy="4873625"/>
   <p:notesSz cx="6858000" cy="9144000"/>
@@ -104,6 +106,11 @@
       </a:defRPr>
     </a:lvl9pPr>
   </p:defaultTextStyle>
+  <p:extLst>
+    <p:ext uri="{EFAFB233-063F-42B5-8137-9DF3F51BA10A}">
+      <p15:sldGuideLst xmlns:p15="http://schemas.microsoft.com/office/powerpoint/2012/main"/>
+    </p:ext>
+  </p:extLst>
 </p:presentation>
 </file>
 
@@ -3630,6 +3637,1310 @@
 </p:sld>
 </file>
 
+<file path=ppt/slides/slide2.xml><?xml version="1.0" encoding="utf-8"?>
+<p:sld xmlns:a="http://schemas.openxmlformats.org/drawingml/2006/main" xmlns:r="http://schemas.openxmlformats.org/officeDocument/2006/relationships" xmlns:p="http://schemas.openxmlformats.org/presentationml/2006/main">
+  <p:cSld>
+    <p:spTree>
+      <p:nvGrpSpPr>
+        <p:cNvPr id="1" name=""/>
+        <p:cNvGrpSpPr/>
+        <p:nvPr/>
+      </p:nvGrpSpPr>
+      <p:grpSpPr>
+        <a:xfrm>
+          <a:off x="0" y="0"/>
+          <a:ext cx="0" cy="0"/>
+          <a:chOff x="0" y="0"/>
+          <a:chExt cx="0" cy="0"/>
+        </a:xfrm>
+      </p:grpSpPr>
+      <p:pic>
+        <p:nvPicPr>
+          <p:cNvPr id="3" name="図 2">
+            <a:extLst>
+              <a:ext uri="{FF2B5EF4-FFF2-40B4-BE49-F238E27FC236}">
+                <a16:creationId xmlns:a16="http://schemas.microsoft.com/office/drawing/2014/main" id="{BA243D3C-C4A4-365B-9EDA-5D36C7ADFAF2}"/>
+              </a:ext>
+            </a:extLst>
+          </p:cNvPr>
+          <p:cNvPicPr>
+            <a:picLocks noChangeAspect="1"/>
+          </p:cNvPicPr>
+          <p:nvPr/>
+        </p:nvPicPr>
+        <p:blipFill>
+          <a:blip r:embed="rId2"/>
+          <a:srcRect r="18423" b="20951"/>
+          <a:stretch>
+            <a:fillRect/>
+          </a:stretch>
+        </p:blipFill>
+        <p:spPr>
+          <a:xfrm>
+            <a:off x="-16510" y="246221"/>
+            <a:ext cx="4873625" cy="3347248"/>
+          </a:xfrm>
+          <a:prstGeom prst="rect">
+            <a:avLst/>
+          </a:prstGeom>
+        </p:spPr>
+      </p:pic>
+      <p:sp>
+        <p:nvSpPr>
+          <p:cNvPr id="4" name="正方形/長方形 3">
+            <a:extLst>
+              <a:ext uri="{FF2B5EF4-FFF2-40B4-BE49-F238E27FC236}">
+                <a16:creationId xmlns:a16="http://schemas.microsoft.com/office/drawing/2014/main" id="{6DA8A918-04BC-A08F-380E-38BCB8E0A92F}"/>
+              </a:ext>
+            </a:extLst>
+          </p:cNvPr>
+          <p:cNvSpPr/>
+          <p:nvPr/>
+        </p:nvSpPr>
+        <p:spPr>
+          <a:xfrm>
+            <a:off x="-1" y="3684905"/>
+            <a:ext cx="4873625" cy="1188720"/>
+          </a:xfrm>
+          <a:prstGeom prst="rect">
+            <a:avLst/>
+          </a:prstGeom>
+          <a:solidFill>
+            <a:srgbClr val="A1887F"/>
+          </a:solidFill>
+          <a:ln>
+            <a:noFill/>
+          </a:ln>
+        </p:spPr>
+        <p:style>
+          <a:lnRef idx="2">
+            <a:schemeClr val="accent1">
+              <a:shade val="15000"/>
+            </a:schemeClr>
+          </a:lnRef>
+          <a:fillRef idx="1">
+            <a:schemeClr val="accent1"/>
+          </a:fillRef>
+          <a:effectRef idx="0">
+            <a:schemeClr val="accent1"/>
+          </a:effectRef>
+          <a:fontRef idx="minor">
+            <a:schemeClr val="lt1"/>
+          </a:fontRef>
+        </p:style>
+        <p:txBody>
+          <a:bodyPr rtlCol="0" anchor="ctr"/>
+          <a:lstStyle/>
+          <a:p>
+            <a:pPr algn="ctr"/>
+            <a:endParaRPr lang="en-US"/>
+          </a:p>
+        </p:txBody>
+      </p:sp>
+      <p:pic>
+        <p:nvPicPr>
+          <p:cNvPr id="6" name="グラフィックス 5" descr="鉛筆 単色塗りつぶし">
+            <a:extLst>
+              <a:ext uri="{FF2B5EF4-FFF2-40B4-BE49-F238E27FC236}">
+                <a16:creationId xmlns:a16="http://schemas.microsoft.com/office/drawing/2014/main" id="{D61ADC0D-6CC2-D273-0622-A0C1648885EA}"/>
+              </a:ext>
+            </a:extLst>
+          </p:cNvPr>
+          <p:cNvPicPr>
+            <a:picLocks noChangeAspect="1"/>
+          </p:cNvPicPr>
+          <p:nvPr/>
+        </p:nvPicPr>
+        <p:blipFill>
+          <a:blip>
+            <a:extLst>
+              <a:ext uri="{96DAC541-7B7A-43D3-8B79-37D633B846F1}">
+                <asvg:svgBlip xmlns:asvg="http://schemas.microsoft.com/office/drawing/2016/SVG/main" r:embed="rId3"/>
+              </a:ext>
+            </a:extLst>
+          </a:blip>
+          <a:stretch>
+            <a:fillRect/>
+          </a:stretch>
+        </p:blipFill>
+        <p:spPr>
+          <a:xfrm>
+            <a:off x="-1" y="3684905"/>
+            <a:ext cx="914400" cy="914400"/>
+          </a:xfrm>
+          <a:prstGeom prst="rect">
+            <a:avLst/>
+          </a:prstGeom>
+        </p:spPr>
+      </p:pic>
+      <p:pic>
+        <p:nvPicPr>
+          <p:cNvPr id="8" name="グラフィックス 7" descr="フリップ式カレンダー 単色塗りつぶし">
+            <a:extLst>
+              <a:ext uri="{FF2B5EF4-FFF2-40B4-BE49-F238E27FC236}">
+                <a16:creationId xmlns:a16="http://schemas.microsoft.com/office/drawing/2014/main" id="{28A38547-C43B-62B3-475D-DCEAD92340DF}"/>
+              </a:ext>
+            </a:extLst>
+          </p:cNvPr>
+          <p:cNvPicPr>
+            <a:picLocks noChangeAspect="1"/>
+          </p:cNvPicPr>
+          <p:nvPr/>
+        </p:nvPicPr>
+        <p:blipFill>
+          <a:blip>
+            <a:extLst>
+              <a:ext uri="{96DAC541-7B7A-43D3-8B79-37D633B846F1}">
+                <asvg:svgBlip xmlns:asvg="http://schemas.microsoft.com/office/drawing/2016/SVG/main" r:embed="rId4"/>
+              </a:ext>
+            </a:extLst>
+          </a:blip>
+          <a:stretch>
+            <a:fillRect/>
+          </a:stretch>
+        </p:blipFill>
+        <p:spPr>
+          <a:xfrm>
+            <a:off x="989805" y="3684905"/>
+            <a:ext cx="914400" cy="914400"/>
+          </a:xfrm>
+          <a:prstGeom prst="rect">
+            <a:avLst/>
+          </a:prstGeom>
+        </p:spPr>
+      </p:pic>
+      <p:pic>
+        <p:nvPicPr>
+          <p:cNvPr id="10" name="グラフィックス 9" descr="ドキュメント 単色塗りつぶし">
+            <a:extLst>
+              <a:ext uri="{FF2B5EF4-FFF2-40B4-BE49-F238E27FC236}">
+                <a16:creationId xmlns:a16="http://schemas.microsoft.com/office/drawing/2014/main" id="{E6ECE616-6EBB-CBB9-D3B0-2F7ED0CC638B}"/>
+              </a:ext>
+            </a:extLst>
+          </p:cNvPr>
+          <p:cNvPicPr>
+            <a:picLocks noChangeAspect="1"/>
+          </p:cNvPicPr>
+          <p:nvPr/>
+        </p:nvPicPr>
+        <p:blipFill>
+          <a:blip>
+            <a:extLst>
+              <a:ext uri="{96DAC541-7B7A-43D3-8B79-37D633B846F1}">
+                <asvg:svgBlip xmlns:asvg="http://schemas.microsoft.com/office/drawing/2016/SVG/main" r:embed="rId5"/>
+              </a:ext>
+            </a:extLst>
+          </a:blip>
+          <a:stretch>
+            <a:fillRect/>
+          </a:stretch>
+        </p:blipFill>
+        <p:spPr>
+          <a:xfrm>
+            <a:off x="1979611" y="3684905"/>
+            <a:ext cx="914400" cy="914400"/>
+          </a:xfrm>
+          <a:prstGeom prst="rect">
+            <a:avLst/>
+          </a:prstGeom>
+        </p:spPr>
+      </p:pic>
+      <p:pic>
+        <p:nvPicPr>
+          <p:cNvPr id="12" name="グラフィックス 11" descr="時計 単色塗りつぶし">
+            <a:extLst>
+              <a:ext uri="{FF2B5EF4-FFF2-40B4-BE49-F238E27FC236}">
+                <a16:creationId xmlns:a16="http://schemas.microsoft.com/office/drawing/2014/main" id="{397E008C-1E99-D12F-3C71-4481AC7BBA2D}"/>
+              </a:ext>
+            </a:extLst>
+          </p:cNvPr>
+          <p:cNvPicPr>
+            <a:picLocks noChangeAspect="1"/>
+          </p:cNvPicPr>
+          <p:nvPr/>
+        </p:nvPicPr>
+        <p:blipFill>
+          <a:blip>
+            <a:extLst>
+              <a:ext uri="{96DAC541-7B7A-43D3-8B79-37D633B846F1}">
+                <asvg:svgBlip xmlns:asvg="http://schemas.microsoft.com/office/drawing/2016/SVG/main" r:embed="rId6"/>
+              </a:ext>
+            </a:extLst>
+          </a:blip>
+          <a:stretch>
+            <a:fillRect/>
+          </a:stretch>
+        </p:blipFill>
+        <p:spPr>
+          <a:xfrm>
+            <a:off x="2969417" y="3684905"/>
+            <a:ext cx="914400" cy="914400"/>
+          </a:xfrm>
+          <a:prstGeom prst="rect">
+            <a:avLst/>
+          </a:prstGeom>
+        </p:spPr>
+      </p:pic>
+      <p:pic>
+        <p:nvPicPr>
+          <p:cNvPr id="14" name="グラフィックス 13" descr="歯車 1 つ 単色塗りつぶし">
+            <a:extLst>
+              <a:ext uri="{FF2B5EF4-FFF2-40B4-BE49-F238E27FC236}">
+                <a16:creationId xmlns:a16="http://schemas.microsoft.com/office/drawing/2014/main" id="{7C1510BF-77A8-3248-323B-D16F1BBE7B47}"/>
+              </a:ext>
+            </a:extLst>
+          </p:cNvPr>
+          <p:cNvPicPr>
+            <a:picLocks noChangeAspect="1"/>
+          </p:cNvPicPr>
+          <p:nvPr/>
+        </p:nvPicPr>
+        <p:blipFill>
+          <a:blip>
+            <a:extLst>
+              <a:ext uri="{96DAC541-7B7A-43D3-8B79-37D633B846F1}">
+                <asvg:svgBlip xmlns:asvg="http://schemas.microsoft.com/office/drawing/2016/SVG/main" r:embed="rId7"/>
+              </a:ext>
+            </a:extLst>
+          </a:blip>
+          <a:stretch>
+            <a:fillRect/>
+          </a:stretch>
+        </p:blipFill>
+        <p:spPr>
+          <a:xfrm>
+            <a:off x="3959225" y="3684905"/>
+            <a:ext cx="914400" cy="914400"/>
+          </a:xfrm>
+          <a:prstGeom prst="rect">
+            <a:avLst/>
+          </a:prstGeom>
+        </p:spPr>
+      </p:pic>
+      <p:sp>
+        <p:nvSpPr>
+          <p:cNvPr id="15" name="テキスト ボックス 14">
+            <a:extLst>
+              <a:ext uri="{FF2B5EF4-FFF2-40B4-BE49-F238E27FC236}">
+                <a16:creationId xmlns:a16="http://schemas.microsoft.com/office/drawing/2014/main" id="{E0F38EE0-FF06-4589-E7C7-C27EB20C5020}"/>
+              </a:ext>
+            </a:extLst>
+          </p:cNvPr>
+          <p:cNvSpPr txBox="1"/>
+          <p:nvPr/>
+        </p:nvSpPr>
+        <p:spPr>
+          <a:xfrm>
+            <a:off x="0" y="4627404"/>
+            <a:ext cx="914400" cy="246221"/>
+          </a:xfrm>
+          <a:prstGeom prst="rect">
+            <a:avLst/>
+          </a:prstGeom>
+          <a:noFill/>
+        </p:spPr>
+        <p:txBody>
+          <a:bodyPr wrap="square" lIns="0" tIns="0" rIns="0" bIns="0" rtlCol="0">
+            <a:spAutoFit/>
+          </a:bodyPr>
+          <a:lstStyle/>
+          <a:p>
+            <a:pPr algn="ctr"/>
+            <a:r>
+              <a:rPr lang="en-US" sz="1600" dirty="0">
+                <a:solidFill>
+                  <a:schemeClr val="bg1"/>
+                </a:solidFill>
+                <a:latin typeface="Arial" panose="020B0604020202020204" pitchFamily="34" charset="0"/>
+                <a:cs typeface="Arial" panose="020B0604020202020204" pitchFamily="34" charset="0"/>
+              </a:rPr>
+              <a:t>Input</a:t>
+            </a:r>
+          </a:p>
+        </p:txBody>
+      </p:sp>
+      <p:sp>
+        <p:nvSpPr>
+          <p:cNvPr id="17" name="テキスト ボックス 16">
+            <a:extLst>
+              <a:ext uri="{FF2B5EF4-FFF2-40B4-BE49-F238E27FC236}">
+                <a16:creationId xmlns:a16="http://schemas.microsoft.com/office/drawing/2014/main" id="{F40BEDC8-156A-B9EC-480D-D9B75BDD26CE}"/>
+              </a:ext>
+            </a:extLst>
+          </p:cNvPr>
+          <p:cNvSpPr txBox="1"/>
+          <p:nvPr/>
+        </p:nvSpPr>
+        <p:spPr>
+          <a:xfrm>
+            <a:off x="989806" y="4627404"/>
+            <a:ext cx="914400" cy="246221"/>
+          </a:xfrm>
+          <a:prstGeom prst="rect">
+            <a:avLst/>
+          </a:prstGeom>
+          <a:noFill/>
+        </p:spPr>
+        <p:txBody>
+          <a:bodyPr wrap="square" lIns="0" tIns="0" rIns="0" bIns="0" rtlCol="0">
+            <a:spAutoFit/>
+          </a:bodyPr>
+          <a:lstStyle/>
+          <a:p>
+            <a:pPr algn="ctr"/>
+            <a:r>
+              <a:rPr lang="en-US" sz="1600" dirty="0">
+                <a:solidFill>
+                  <a:schemeClr val="bg1"/>
+                </a:solidFill>
+                <a:latin typeface="Arial" panose="020B0604020202020204" pitchFamily="34" charset="0"/>
+                <a:cs typeface="Arial" panose="020B0604020202020204" pitchFamily="34" charset="0"/>
+              </a:rPr>
+              <a:t>Calendar</a:t>
+            </a:r>
+          </a:p>
+        </p:txBody>
+      </p:sp>
+      <p:sp>
+        <p:nvSpPr>
+          <p:cNvPr id="19" name="テキスト ボックス 18">
+            <a:extLst>
+              <a:ext uri="{FF2B5EF4-FFF2-40B4-BE49-F238E27FC236}">
+                <a16:creationId xmlns:a16="http://schemas.microsoft.com/office/drawing/2014/main" id="{D5FE0694-C101-4783-EA2B-266CCB20A8D1}"/>
+              </a:ext>
+            </a:extLst>
+          </p:cNvPr>
+          <p:cNvSpPr txBox="1"/>
+          <p:nvPr/>
+        </p:nvSpPr>
+        <p:spPr>
+          <a:xfrm>
+            <a:off x="1979611" y="4627404"/>
+            <a:ext cx="914400" cy="246221"/>
+          </a:xfrm>
+          <a:prstGeom prst="rect">
+            <a:avLst/>
+          </a:prstGeom>
+          <a:noFill/>
+        </p:spPr>
+        <p:txBody>
+          <a:bodyPr wrap="square" lIns="0" tIns="0" rIns="0" bIns="0" rtlCol="0">
+            <a:spAutoFit/>
+          </a:bodyPr>
+          <a:lstStyle/>
+          <a:p>
+            <a:pPr algn="ctr"/>
+            <a:r>
+              <a:rPr lang="en-US" sz="1600" dirty="0">
+                <a:solidFill>
+                  <a:schemeClr val="bg1"/>
+                </a:solidFill>
+                <a:latin typeface="Arial" panose="020B0604020202020204" pitchFamily="34" charset="0"/>
+                <a:cs typeface="Arial" panose="020B0604020202020204" pitchFamily="34" charset="0"/>
+              </a:rPr>
+              <a:t>Summary</a:t>
+            </a:r>
+          </a:p>
+        </p:txBody>
+      </p:sp>
+      <p:sp>
+        <p:nvSpPr>
+          <p:cNvPr id="21" name="テキスト ボックス 20">
+            <a:extLst>
+              <a:ext uri="{FF2B5EF4-FFF2-40B4-BE49-F238E27FC236}">
+                <a16:creationId xmlns:a16="http://schemas.microsoft.com/office/drawing/2014/main" id="{B4DA3950-6DE4-794D-EDDE-DA540C6AC974}"/>
+              </a:ext>
+            </a:extLst>
+          </p:cNvPr>
+          <p:cNvSpPr txBox="1"/>
+          <p:nvPr/>
+        </p:nvSpPr>
+        <p:spPr>
+          <a:xfrm>
+            <a:off x="2969418" y="4627404"/>
+            <a:ext cx="914400" cy="246221"/>
+          </a:xfrm>
+          <a:prstGeom prst="rect">
+            <a:avLst/>
+          </a:prstGeom>
+          <a:noFill/>
+        </p:spPr>
+        <p:txBody>
+          <a:bodyPr wrap="square" lIns="0" tIns="0" rIns="0" bIns="0" rtlCol="0">
+            <a:spAutoFit/>
+          </a:bodyPr>
+          <a:lstStyle/>
+          <a:p>
+            <a:pPr algn="ctr"/>
+            <a:r>
+              <a:rPr lang="en-US" sz="1600" dirty="0">
+                <a:solidFill>
+                  <a:schemeClr val="bg1"/>
+                </a:solidFill>
+                <a:latin typeface="Arial" panose="020B0604020202020204" pitchFamily="34" charset="0"/>
+                <a:cs typeface="Arial" panose="020B0604020202020204" pitchFamily="34" charset="0"/>
+              </a:rPr>
+              <a:t>History</a:t>
+            </a:r>
+          </a:p>
+        </p:txBody>
+      </p:sp>
+      <p:sp>
+        <p:nvSpPr>
+          <p:cNvPr id="23" name="テキスト ボックス 22">
+            <a:extLst>
+              <a:ext uri="{FF2B5EF4-FFF2-40B4-BE49-F238E27FC236}">
+                <a16:creationId xmlns:a16="http://schemas.microsoft.com/office/drawing/2014/main" id="{6072BB1D-24E6-2CBA-705E-00587AEF6C67}"/>
+              </a:ext>
+            </a:extLst>
+          </p:cNvPr>
+          <p:cNvSpPr txBox="1"/>
+          <p:nvPr/>
+        </p:nvSpPr>
+        <p:spPr>
+          <a:xfrm>
+            <a:off x="3959225" y="4627404"/>
+            <a:ext cx="914400" cy="246221"/>
+          </a:xfrm>
+          <a:prstGeom prst="rect">
+            <a:avLst/>
+          </a:prstGeom>
+          <a:noFill/>
+        </p:spPr>
+        <p:txBody>
+          <a:bodyPr wrap="square" lIns="0" tIns="0" rIns="0" bIns="0" rtlCol="0">
+            <a:spAutoFit/>
+          </a:bodyPr>
+          <a:lstStyle/>
+          <a:p>
+            <a:pPr algn="ctr"/>
+            <a:r>
+              <a:rPr lang="en-US" sz="1600" dirty="0">
+                <a:solidFill>
+                  <a:schemeClr val="bg1"/>
+                </a:solidFill>
+                <a:latin typeface="Arial" panose="020B0604020202020204" pitchFamily="34" charset="0"/>
+                <a:cs typeface="Arial" panose="020B0604020202020204" pitchFamily="34" charset="0"/>
+              </a:rPr>
+              <a:t>Setting</a:t>
+            </a:r>
+          </a:p>
+        </p:txBody>
+      </p:sp>
+    </p:spTree>
+    <p:extLst>
+      <p:ext uri="{BB962C8B-B14F-4D97-AF65-F5344CB8AC3E}">
+        <p14:creationId xmlns:p14="http://schemas.microsoft.com/office/powerpoint/2010/main" val="3383263183"/>
+      </p:ext>
+    </p:extLst>
+  </p:cSld>
+  <p:clrMapOvr>
+    <a:masterClrMapping/>
+  </p:clrMapOvr>
+</p:sld>
+</file>
+
+<file path=ppt/slides/slide3.xml><?xml version="1.0" encoding="utf-8"?>
+<p:sld xmlns:a="http://schemas.openxmlformats.org/drawingml/2006/main" xmlns:r="http://schemas.openxmlformats.org/officeDocument/2006/relationships" xmlns:p="http://schemas.openxmlformats.org/presentationml/2006/main">
+  <p:cSld>
+    <p:spTree>
+      <p:nvGrpSpPr>
+        <p:cNvPr id="1" name=""/>
+        <p:cNvGrpSpPr/>
+        <p:nvPr/>
+      </p:nvGrpSpPr>
+      <p:grpSpPr>
+        <a:xfrm>
+          <a:off x="0" y="0"/>
+          <a:ext cx="0" cy="0"/>
+          <a:chOff x="0" y="0"/>
+          <a:chExt cx="0" cy="0"/>
+        </a:xfrm>
+      </p:grpSpPr>
+      <p:pic>
+        <p:nvPicPr>
+          <p:cNvPr id="7" name="図 6">
+            <a:extLst>
+              <a:ext uri="{FF2B5EF4-FFF2-40B4-BE49-F238E27FC236}">
+                <a16:creationId xmlns:a16="http://schemas.microsoft.com/office/drawing/2014/main" id="{A446420E-8168-E70A-6953-64567A259033}"/>
+              </a:ext>
+            </a:extLst>
+          </p:cNvPr>
+          <p:cNvPicPr>
+            <a:picLocks noChangeAspect="1"/>
+          </p:cNvPicPr>
+          <p:nvPr/>
+        </p:nvPicPr>
+        <p:blipFill>
+          <a:blip r:embed="rId2"/>
+          <a:stretch>
+            <a:fillRect/>
+          </a:stretch>
+        </p:blipFill>
+        <p:spPr>
+          <a:xfrm>
+            <a:off x="5848354" y="-324963"/>
+            <a:ext cx="2737607" cy="4873625"/>
+          </a:xfrm>
+          <a:prstGeom prst="rect">
+            <a:avLst/>
+          </a:prstGeom>
+        </p:spPr>
+      </p:pic>
+      <p:grpSp>
+        <p:nvGrpSpPr>
+          <p:cNvPr id="12" name="グループ化 11">
+            <a:extLst>
+              <a:ext uri="{FF2B5EF4-FFF2-40B4-BE49-F238E27FC236}">
+                <a16:creationId xmlns:a16="http://schemas.microsoft.com/office/drawing/2014/main" id="{32654185-6E6F-B80B-D58C-B2A1430F47F9}"/>
+              </a:ext>
+            </a:extLst>
+          </p:cNvPr>
+          <p:cNvGrpSpPr/>
+          <p:nvPr/>
+        </p:nvGrpSpPr>
+        <p:grpSpPr>
+          <a:xfrm>
+            <a:off x="341794" y="238181"/>
+            <a:ext cx="4190035" cy="914400"/>
+            <a:chOff x="341794" y="1782501"/>
+            <a:chExt cx="4190035" cy="914400"/>
+          </a:xfrm>
+        </p:grpSpPr>
+        <p:sp>
+          <p:nvSpPr>
+            <p:cNvPr id="2" name="四角形: 角を丸くする 1">
+              <a:extLst>
+                <a:ext uri="{FF2B5EF4-FFF2-40B4-BE49-F238E27FC236}">
+                  <a16:creationId xmlns:a16="http://schemas.microsoft.com/office/drawing/2014/main" id="{B5B02C0F-15FF-839A-1007-F414941F0609}"/>
+                </a:ext>
+              </a:extLst>
+            </p:cNvPr>
+            <p:cNvSpPr/>
+            <p:nvPr/>
+          </p:nvSpPr>
+          <p:spPr>
+            <a:xfrm>
+              <a:off x="341794" y="1782501"/>
+              <a:ext cx="4190035" cy="914400"/>
+            </a:xfrm>
+            <a:prstGeom prst="roundRect">
+              <a:avLst/>
+            </a:prstGeom>
+            <a:solidFill>
+              <a:schemeClr val="bg1"/>
+            </a:solidFill>
+            <a:ln>
+              <a:noFill/>
+            </a:ln>
+            <a:effectLst>
+              <a:glow rad="63500">
+                <a:schemeClr val="tx1">
+                  <a:alpha val="40000"/>
+                </a:schemeClr>
+              </a:glow>
+            </a:effectLst>
+          </p:spPr>
+          <p:style>
+            <a:lnRef idx="2">
+              <a:schemeClr val="accent1">
+                <a:shade val="15000"/>
+              </a:schemeClr>
+            </a:lnRef>
+            <a:fillRef idx="1">
+              <a:schemeClr val="accent1"/>
+            </a:fillRef>
+            <a:effectRef idx="0">
+              <a:schemeClr val="accent1"/>
+            </a:effectRef>
+            <a:fontRef idx="minor">
+              <a:schemeClr val="lt1"/>
+            </a:fontRef>
+          </p:style>
+          <p:txBody>
+            <a:bodyPr rtlCol="0" anchor="ctr"/>
+            <a:lstStyle/>
+            <a:p>
+              <a:pPr algn="ctr"/>
+              <a:endParaRPr lang="en-US"/>
+            </a:p>
+          </p:txBody>
+        </p:sp>
+        <p:sp>
+          <p:nvSpPr>
+            <p:cNvPr id="5" name="テキスト ボックス 4">
+              <a:extLst>
+                <a:ext uri="{FF2B5EF4-FFF2-40B4-BE49-F238E27FC236}">
+                  <a16:creationId xmlns:a16="http://schemas.microsoft.com/office/drawing/2014/main" id="{4117244F-9C39-07DD-EFDA-228D4B0865E4}"/>
+                </a:ext>
+              </a:extLst>
+            </p:cNvPr>
+            <p:cNvSpPr txBox="1"/>
+            <p:nvPr/>
+          </p:nvSpPr>
+          <p:spPr>
+            <a:xfrm>
+              <a:off x="770463" y="2296033"/>
+              <a:ext cx="1481328" cy="338554"/>
+            </a:xfrm>
+            <a:prstGeom prst="rect">
+              <a:avLst/>
+            </a:prstGeom>
+            <a:noFill/>
+          </p:spPr>
+          <p:txBody>
+            <a:bodyPr wrap="square" rtlCol="0">
+              <a:spAutoFit/>
+            </a:bodyPr>
+            <a:lstStyle/>
+            <a:p>
+              <a:r>
+                <a:rPr lang="en-US" sz="1600" dirty="0">
+                  <a:latin typeface="Arial" panose="020B0604020202020204" pitchFamily="34" charset="0"/>
+                  <a:cs typeface="Arial" panose="020B0604020202020204" pitchFamily="34" charset="0"/>
+                </a:rPr>
+                <a:t>YYYY-MM-DD</a:t>
+              </a:r>
+            </a:p>
+          </p:txBody>
+        </p:sp>
+        <p:sp>
+          <p:nvSpPr>
+            <p:cNvPr id="3" name="テキスト ボックス 2">
+              <a:extLst>
+                <a:ext uri="{FF2B5EF4-FFF2-40B4-BE49-F238E27FC236}">
+                  <a16:creationId xmlns:a16="http://schemas.microsoft.com/office/drawing/2014/main" id="{C6560416-426C-8618-6E75-35E3AE8059E6}"/>
+                </a:ext>
+              </a:extLst>
+            </p:cNvPr>
+            <p:cNvSpPr txBox="1"/>
+            <p:nvPr/>
+          </p:nvSpPr>
+          <p:spPr>
+            <a:xfrm>
+              <a:off x="770463" y="1847292"/>
+              <a:ext cx="1215342" cy="400110"/>
+            </a:xfrm>
+            <a:prstGeom prst="rect">
+              <a:avLst/>
+            </a:prstGeom>
+            <a:noFill/>
+          </p:spPr>
+          <p:txBody>
+            <a:bodyPr wrap="square" rtlCol="0" anchor="ctr">
+              <a:spAutoFit/>
+            </a:bodyPr>
+            <a:lstStyle/>
+            <a:p>
+              <a:r>
+                <a:rPr lang="en-US" sz="2000" dirty="0">
+                  <a:latin typeface="Arial" panose="020B0604020202020204" pitchFamily="34" charset="0"/>
+                  <a:cs typeface="Arial" panose="020B0604020202020204" pitchFamily="34" charset="0"/>
+                </a:rPr>
+                <a:t>Remarks</a:t>
+              </a:r>
+            </a:p>
+          </p:txBody>
+        </p:sp>
+        <p:sp>
+          <p:nvSpPr>
+            <p:cNvPr id="8" name="四角形: 角を丸くする 7">
+              <a:extLst>
+                <a:ext uri="{FF2B5EF4-FFF2-40B4-BE49-F238E27FC236}">
+                  <a16:creationId xmlns:a16="http://schemas.microsoft.com/office/drawing/2014/main" id="{A5D06DBA-E45C-7B0E-DA6F-CA168EF2B20B}"/>
+                </a:ext>
+              </a:extLst>
+            </p:cNvPr>
+            <p:cNvSpPr/>
+            <p:nvPr/>
+          </p:nvSpPr>
+          <p:spPr>
+            <a:xfrm>
+              <a:off x="468711" y="1896471"/>
+              <a:ext cx="301752" cy="301752"/>
+            </a:xfrm>
+            <a:prstGeom prst="roundRect">
+              <a:avLst/>
+            </a:prstGeom>
+            <a:solidFill>
+              <a:srgbClr val="E4BDCB"/>
+            </a:solidFill>
+            <a:ln>
+              <a:noFill/>
+            </a:ln>
+          </p:spPr>
+          <p:style>
+            <a:lnRef idx="2">
+              <a:schemeClr val="accent1">
+                <a:shade val="15000"/>
+              </a:schemeClr>
+            </a:lnRef>
+            <a:fillRef idx="1">
+              <a:schemeClr val="accent1"/>
+            </a:fillRef>
+            <a:effectRef idx="0">
+              <a:schemeClr val="accent1"/>
+            </a:effectRef>
+            <a:fontRef idx="minor">
+              <a:schemeClr val="lt1"/>
+            </a:fontRef>
+          </p:style>
+          <p:txBody>
+            <a:bodyPr rtlCol="0" anchor="ctr"/>
+            <a:lstStyle/>
+            <a:p>
+              <a:pPr algn="ctr"/>
+              <a:endParaRPr lang="en-US"/>
+            </a:p>
+          </p:txBody>
+        </p:sp>
+        <p:sp>
+          <p:nvSpPr>
+            <p:cNvPr id="10" name="テキスト ボックス 9">
+              <a:extLst>
+                <a:ext uri="{FF2B5EF4-FFF2-40B4-BE49-F238E27FC236}">
+                  <a16:creationId xmlns:a16="http://schemas.microsoft.com/office/drawing/2014/main" id="{C2BAE1A8-CAF4-3F4E-A2AC-6763751FBB14}"/>
+                </a:ext>
+              </a:extLst>
+            </p:cNvPr>
+            <p:cNvSpPr txBox="1"/>
+            <p:nvPr/>
+          </p:nvSpPr>
+          <p:spPr>
+            <a:xfrm>
+              <a:off x="3050500" y="2234477"/>
+              <a:ext cx="1481328" cy="400110"/>
+            </a:xfrm>
+            <a:prstGeom prst="rect">
+              <a:avLst/>
+            </a:prstGeom>
+            <a:noFill/>
+          </p:spPr>
+          <p:txBody>
+            <a:bodyPr wrap="square" rtlCol="0">
+              <a:spAutoFit/>
+            </a:bodyPr>
+            <a:lstStyle/>
+            <a:p>
+              <a:r>
+                <a:rPr lang="en-US" sz="2000" dirty="0">
+                  <a:latin typeface="Arial" panose="020B0604020202020204" pitchFamily="34" charset="0"/>
+                  <a:cs typeface="Arial" panose="020B0604020202020204" pitchFamily="34" charset="0"/>
+                </a:rPr>
+                <a:t>X,XXX JPY</a:t>
+              </a:r>
+            </a:p>
+          </p:txBody>
+        </p:sp>
+      </p:grpSp>
+      <p:sp>
+        <p:nvSpPr>
+          <p:cNvPr id="14" name="四角形: 角を丸くする 13">
+            <a:extLst>
+              <a:ext uri="{FF2B5EF4-FFF2-40B4-BE49-F238E27FC236}">
+                <a16:creationId xmlns:a16="http://schemas.microsoft.com/office/drawing/2014/main" id="{40B8350B-29C1-B9CA-4917-CEE83DF99310}"/>
+              </a:ext>
+            </a:extLst>
+          </p:cNvPr>
+          <p:cNvSpPr/>
+          <p:nvPr/>
+        </p:nvSpPr>
+        <p:spPr>
+          <a:xfrm>
+            <a:off x="341793" y="1666112"/>
+            <a:ext cx="4190035" cy="2011807"/>
+          </a:xfrm>
+          <a:prstGeom prst="roundRect">
+            <a:avLst/>
+          </a:prstGeom>
+          <a:solidFill>
+            <a:schemeClr val="bg1"/>
+          </a:solidFill>
+          <a:ln>
+            <a:noFill/>
+          </a:ln>
+          <a:effectLst>
+            <a:glow rad="63500">
+              <a:schemeClr val="tx1">
+                <a:alpha val="40000"/>
+              </a:schemeClr>
+            </a:glow>
+          </a:effectLst>
+        </p:spPr>
+        <p:style>
+          <a:lnRef idx="2">
+            <a:schemeClr val="accent1">
+              <a:shade val="15000"/>
+            </a:schemeClr>
+          </a:lnRef>
+          <a:fillRef idx="1">
+            <a:schemeClr val="accent1"/>
+          </a:fillRef>
+          <a:effectRef idx="0">
+            <a:schemeClr val="accent1"/>
+          </a:effectRef>
+          <a:fontRef idx="minor">
+            <a:schemeClr val="lt1"/>
+          </a:fontRef>
+        </p:style>
+        <p:txBody>
+          <a:bodyPr rtlCol="0" anchor="ctr"/>
+          <a:lstStyle/>
+          <a:p>
+            <a:pPr algn="ctr"/>
+            <a:endParaRPr lang="en-US"/>
+          </a:p>
+        </p:txBody>
+      </p:sp>
+      <p:sp>
+        <p:nvSpPr>
+          <p:cNvPr id="15" name="テキスト ボックス 14">
+            <a:extLst>
+              <a:ext uri="{FF2B5EF4-FFF2-40B4-BE49-F238E27FC236}">
+                <a16:creationId xmlns:a16="http://schemas.microsoft.com/office/drawing/2014/main" id="{CDDF5589-9B54-7F29-5FB8-8E76CF32394B}"/>
+              </a:ext>
+            </a:extLst>
+          </p:cNvPr>
+          <p:cNvSpPr txBox="1"/>
+          <p:nvPr/>
+        </p:nvSpPr>
+        <p:spPr>
+          <a:xfrm>
+            <a:off x="854281" y="2260546"/>
+            <a:ext cx="1481328" cy="246221"/>
+          </a:xfrm>
+          <a:prstGeom prst="rect">
+            <a:avLst/>
+          </a:prstGeom>
+          <a:noFill/>
+        </p:spPr>
+        <p:txBody>
+          <a:bodyPr wrap="square" lIns="0" tIns="0" rIns="0" bIns="0" rtlCol="0">
+            <a:spAutoFit/>
+          </a:bodyPr>
+          <a:lstStyle/>
+          <a:p>
+            <a:r>
+              <a:rPr lang="en-US" sz="1600" dirty="0">
+                <a:latin typeface="Arial" panose="020B0604020202020204" pitchFamily="34" charset="0"/>
+                <a:cs typeface="Arial" panose="020B0604020202020204" pitchFamily="34" charset="0"/>
+              </a:rPr>
+              <a:t>YYYY-MM-DD</a:t>
+            </a:r>
+          </a:p>
+        </p:txBody>
+      </p:sp>
+      <p:sp>
+        <p:nvSpPr>
+          <p:cNvPr id="16" name="テキスト ボックス 15">
+            <a:extLst>
+              <a:ext uri="{FF2B5EF4-FFF2-40B4-BE49-F238E27FC236}">
+                <a16:creationId xmlns:a16="http://schemas.microsoft.com/office/drawing/2014/main" id="{538CCB91-EB1D-2E9F-CE82-A9D0C2AF8671}"/>
+              </a:ext>
+            </a:extLst>
+          </p:cNvPr>
+          <p:cNvSpPr txBox="1"/>
+          <p:nvPr/>
+        </p:nvSpPr>
+        <p:spPr>
+          <a:xfrm>
+            <a:off x="854281" y="1777070"/>
+            <a:ext cx="1280160" cy="307777"/>
+          </a:xfrm>
+          <a:prstGeom prst="rect">
+            <a:avLst/>
+          </a:prstGeom>
+          <a:noFill/>
+        </p:spPr>
+        <p:txBody>
+          <a:bodyPr wrap="square" lIns="0" tIns="0" rIns="0" bIns="0" rtlCol="0" anchor="ctr">
+            <a:spAutoFit/>
+          </a:bodyPr>
+          <a:lstStyle/>
+          <a:p>
+            <a:r>
+              <a:rPr lang="en-US" sz="2000" dirty="0">
+                <a:latin typeface="Arial" panose="020B0604020202020204" pitchFamily="34" charset="0"/>
+                <a:cs typeface="Arial" panose="020B0604020202020204" pitchFamily="34" charset="0"/>
+              </a:rPr>
+              <a:t>Remarks</a:t>
+            </a:r>
+          </a:p>
+        </p:txBody>
+      </p:sp>
+      <p:sp>
+        <p:nvSpPr>
+          <p:cNvPr id="17" name="四角形: 角を丸くする 16">
+            <a:extLst>
+              <a:ext uri="{FF2B5EF4-FFF2-40B4-BE49-F238E27FC236}">
+                <a16:creationId xmlns:a16="http://schemas.microsoft.com/office/drawing/2014/main" id="{ED132300-8673-7C7A-5A5F-9EDFF8EDE6A8}"/>
+              </a:ext>
+            </a:extLst>
+          </p:cNvPr>
+          <p:cNvSpPr/>
+          <p:nvPr/>
+        </p:nvSpPr>
+        <p:spPr>
+          <a:xfrm>
+            <a:off x="468710" y="1780083"/>
+            <a:ext cx="301752" cy="301752"/>
+          </a:xfrm>
+          <a:prstGeom prst="roundRect">
+            <a:avLst/>
+          </a:prstGeom>
+          <a:solidFill>
+            <a:srgbClr val="E4BDCB"/>
+          </a:solidFill>
+          <a:ln>
+            <a:noFill/>
+          </a:ln>
+        </p:spPr>
+        <p:style>
+          <a:lnRef idx="2">
+            <a:schemeClr val="accent1">
+              <a:shade val="15000"/>
+            </a:schemeClr>
+          </a:lnRef>
+          <a:fillRef idx="1">
+            <a:schemeClr val="accent1"/>
+          </a:fillRef>
+          <a:effectRef idx="0">
+            <a:schemeClr val="accent1"/>
+          </a:effectRef>
+          <a:fontRef idx="minor">
+            <a:schemeClr val="lt1"/>
+          </a:fontRef>
+        </p:style>
+        <p:txBody>
+          <a:bodyPr rtlCol="0" anchor="ctr"/>
+          <a:lstStyle/>
+          <a:p>
+            <a:pPr algn="ctr"/>
+            <a:endParaRPr lang="en-US"/>
+          </a:p>
+        </p:txBody>
+      </p:sp>
+      <p:sp>
+        <p:nvSpPr>
+          <p:cNvPr id="18" name="テキスト ボックス 17">
+            <a:extLst>
+              <a:ext uri="{FF2B5EF4-FFF2-40B4-BE49-F238E27FC236}">
+                <a16:creationId xmlns:a16="http://schemas.microsoft.com/office/drawing/2014/main" id="{92461B21-F6DF-C9EF-0775-67AB5D07F192}"/>
+              </a:ext>
+            </a:extLst>
+          </p:cNvPr>
+          <p:cNvSpPr txBox="1"/>
+          <p:nvPr/>
+        </p:nvSpPr>
+        <p:spPr>
+          <a:xfrm>
+            <a:off x="3050500" y="3190466"/>
+            <a:ext cx="1481328" cy="307777"/>
+          </a:xfrm>
+          <a:prstGeom prst="rect">
+            <a:avLst/>
+          </a:prstGeom>
+          <a:noFill/>
+        </p:spPr>
+        <p:txBody>
+          <a:bodyPr wrap="square" lIns="0" tIns="0" rIns="0" bIns="0" rtlCol="0" anchor="b">
+            <a:spAutoFit/>
+          </a:bodyPr>
+          <a:lstStyle/>
+          <a:p>
+            <a:r>
+              <a:rPr lang="en-US" sz="2000" dirty="0">
+                <a:latin typeface="Arial" panose="020B0604020202020204" pitchFamily="34" charset="0"/>
+                <a:cs typeface="Arial" panose="020B0604020202020204" pitchFamily="34" charset="0"/>
+              </a:rPr>
+              <a:t>X,XXX JPY</a:t>
+            </a:r>
+          </a:p>
+        </p:txBody>
+      </p:sp>
+      <p:sp>
+        <p:nvSpPr>
+          <p:cNvPr id="20" name="テキスト ボックス 19">
+            <a:extLst>
+              <a:ext uri="{FF2B5EF4-FFF2-40B4-BE49-F238E27FC236}">
+                <a16:creationId xmlns:a16="http://schemas.microsoft.com/office/drawing/2014/main" id="{0BEC9D2E-DB87-5619-47F6-B96A36019486}"/>
+              </a:ext>
+            </a:extLst>
+          </p:cNvPr>
+          <p:cNvSpPr txBox="1"/>
+          <p:nvPr/>
+        </p:nvSpPr>
+        <p:spPr>
+          <a:xfrm>
+            <a:off x="3045272" y="2260546"/>
+            <a:ext cx="1097280" cy="246221"/>
+          </a:xfrm>
+          <a:prstGeom prst="rect">
+            <a:avLst/>
+          </a:prstGeom>
+          <a:noFill/>
+        </p:spPr>
+        <p:txBody>
+          <a:bodyPr wrap="square" lIns="0" tIns="0" rIns="0" bIns="0" rtlCol="0">
+            <a:spAutoFit/>
+          </a:bodyPr>
+          <a:lstStyle/>
+          <a:p>
+            <a:r>
+              <a:rPr lang="en-US" sz="1600" dirty="0">
+                <a:latin typeface="Arial" panose="020B0604020202020204" pitchFamily="34" charset="0"/>
+                <a:cs typeface="Arial" panose="020B0604020202020204" pitchFamily="34" charset="0"/>
+              </a:rPr>
+              <a:t>Category</a:t>
+            </a:r>
+          </a:p>
+        </p:txBody>
+      </p:sp>
+      <p:sp>
+        <p:nvSpPr>
+          <p:cNvPr id="27" name="テキスト ボックス 26">
+            <a:extLst>
+              <a:ext uri="{FF2B5EF4-FFF2-40B4-BE49-F238E27FC236}">
+                <a16:creationId xmlns:a16="http://schemas.microsoft.com/office/drawing/2014/main" id="{D1AB1AF1-FB3C-7B3F-B21A-DCB433FAFACF}"/>
+              </a:ext>
+            </a:extLst>
+          </p:cNvPr>
+          <p:cNvSpPr txBox="1"/>
+          <p:nvPr/>
+        </p:nvSpPr>
+        <p:spPr>
+          <a:xfrm>
+            <a:off x="854281" y="2728632"/>
+            <a:ext cx="1252728" cy="246221"/>
+          </a:xfrm>
+          <a:prstGeom prst="rect">
+            <a:avLst/>
+          </a:prstGeom>
+          <a:noFill/>
+        </p:spPr>
+        <p:txBody>
+          <a:bodyPr wrap="square" lIns="0" tIns="0" rIns="0" bIns="0" rtlCol="0">
+            <a:spAutoFit/>
+          </a:bodyPr>
+          <a:lstStyle/>
+          <a:p>
+            <a:r>
+              <a:rPr lang="en-US" sz="1600" dirty="0">
+                <a:latin typeface="Arial" panose="020B0604020202020204" pitchFamily="34" charset="0"/>
+                <a:cs typeface="Arial" panose="020B0604020202020204" pitchFamily="34" charset="0"/>
+              </a:rPr>
+              <a:t>Amount</a:t>
+            </a:r>
+          </a:p>
+        </p:txBody>
+      </p:sp>
+      <p:sp>
+        <p:nvSpPr>
+          <p:cNvPr id="29" name="テキスト ボックス 28">
+            <a:extLst>
+              <a:ext uri="{FF2B5EF4-FFF2-40B4-BE49-F238E27FC236}">
+                <a16:creationId xmlns:a16="http://schemas.microsoft.com/office/drawing/2014/main" id="{AC97EDD0-37D2-6BAA-5D96-F40C4C1F95A3}"/>
+              </a:ext>
+            </a:extLst>
+          </p:cNvPr>
+          <p:cNvSpPr txBox="1"/>
+          <p:nvPr/>
+        </p:nvSpPr>
+        <p:spPr>
+          <a:xfrm>
+            <a:off x="1907867" y="2728632"/>
+            <a:ext cx="1252728" cy="246221"/>
+          </a:xfrm>
+          <a:prstGeom prst="rect">
+            <a:avLst/>
+          </a:prstGeom>
+          <a:noFill/>
+        </p:spPr>
+        <p:txBody>
+          <a:bodyPr wrap="square" lIns="0" tIns="0" rIns="0" bIns="0" rtlCol="0">
+            <a:spAutoFit/>
+          </a:bodyPr>
+          <a:lstStyle/>
+          <a:p>
+            <a:r>
+              <a:rPr lang="en-US" sz="1600" dirty="0">
+                <a:latin typeface="Arial" panose="020B0604020202020204" pitchFamily="34" charset="0"/>
+                <a:cs typeface="Arial" panose="020B0604020202020204" pitchFamily="34" charset="0"/>
+              </a:rPr>
+              <a:t>Currency</a:t>
+            </a:r>
+          </a:p>
+        </p:txBody>
+      </p:sp>
+      <p:sp>
+        <p:nvSpPr>
+          <p:cNvPr id="31" name="テキスト ボックス 30">
+            <a:extLst>
+              <a:ext uri="{FF2B5EF4-FFF2-40B4-BE49-F238E27FC236}">
+                <a16:creationId xmlns:a16="http://schemas.microsoft.com/office/drawing/2014/main" id="{A80B5D97-B753-C2E6-E939-54B0A294AD91}"/>
+              </a:ext>
+            </a:extLst>
+          </p:cNvPr>
+          <p:cNvSpPr txBox="1"/>
+          <p:nvPr/>
+        </p:nvSpPr>
+        <p:spPr>
+          <a:xfrm>
+            <a:off x="3045272" y="2728632"/>
+            <a:ext cx="1252728" cy="246221"/>
+          </a:xfrm>
+          <a:prstGeom prst="rect">
+            <a:avLst/>
+          </a:prstGeom>
+          <a:noFill/>
+        </p:spPr>
+        <p:txBody>
+          <a:bodyPr wrap="square" lIns="0" tIns="0" rIns="0" bIns="0" rtlCol="0">
+            <a:spAutoFit/>
+          </a:bodyPr>
+          <a:lstStyle/>
+          <a:p>
+            <a:r>
+              <a:rPr lang="en-US" sz="1600" dirty="0">
+                <a:latin typeface="Arial" panose="020B0604020202020204" pitchFamily="34" charset="0"/>
+                <a:cs typeface="Arial" panose="020B0604020202020204" pitchFamily="34" charset="0"/>
+              </a:rPr>
+              <a:t>Rate</a:t>
+            </a:r>
+          </a:p>
+        </p:txBody>
+      </p:sp>
+      <p:sp>
+        <p:nvSpPr>
+          <p:cNvPr id="32" name="四角形: 角を丸くする 31">
+            <a:extLst>
+              <a:ext uri="{FF2B5EF4-FFF2-40B4-BE49-F238E27FC236}">
+                <a16:creationId xmlns:a16="http://schemas.microsoft.com/office/drawing/2014/main" id="{94FDBE0E-395A-9339-56DD-FD9A23BD1DC8}"/>
+              </a:ext>
+            </a:extLst>
+          </p:cNvPr>
+          <p:cNvSpPr/>
+          <p:nvPr/>
+        </p:nvSpPr>
+        <p:spPr>
+          <a:xfrm>
+            <a:off x="854281" y="3196491"/>
+            <a:ext cx="914400" cy="301752"/>
+          </a:xfrm>
+          <a:prstGeom prst="roundRect">
+            <a:avLst/>
+          </a:prstGeom>
+          <a:solidFill>
+            <a:srgbClr val="A1887F"/>
+          </a:solidFill>
+          <a:ln>
+            <a:noFill/>
+          </a:ln>
+        </p:spPr>
+        <p:style>
+          <a:lnRef idx="2">
+            <a:schemeClr val="accent1">
+              <a:shade val="15000"/>
+            </a:schemeClr>
+          </a:lnRef>
+          <a:fillRef idx="1">
+            <a:schemeClr val="accent1"/>
+          </a:fillRef>
+          <a:effectRef idx="0">
+            <a:schemeClr val="accent1"/>
+          </a:effectRef>
+          <a:fontRef idx="minor">
+            <a:schemeClr val="lt1"/>
+          </a:fontRef>
+        </p:style>
+        <p:txBody>
+          <a:bodyPr rtlCol="0" anchor="ctr"/>
+          <a:lstStyle/>
+          <a:p>
+            <a:pPr algn="ctr"/>
+            <a:r>
+              <a:rPr lang="en-US" dirty="0">
+                <a:solidFill>
+                  <a:schemeClr val="bg1"/>
+                </a:solidFill>
+              </a:rPr>
+              <a:t>Edit</a:t>
+            </a:r>
+          </a:p>
+        </p:txBody>
+      </p:sp>
+      <p:sp>
+        <p:nvSpPr>
+          <p:cNvPr id="37" name="四角形: 角を丸くする 36">
+            <a:extLst>
+              <a:ext uri="{FF2B5EF4-FFF2-40B4-BE49-F238E27FC236}">
+                <a16:creationId xmlns:a16="http://schemas.microsoft.com/office/drawing/2014/main" id="{5A4FD334-BB61-08B4-EEE8-1C34FF2B9133}"/>
+              </a:ext>
+            </a:extLst>
+          </p:cNvPr>
+          <p:cNvSpPr/>
+          <p:nvPr/>
+        </p:nvSpPr>
+        <p:spPr>
+          <a:xfrm>
+            <a:off x="1907867" y="3196491"/>
+            <a:ext cx="914400" cy="301752"/>
+          </a:xfrm>
+          <a:prstGeom prst="roundRect">
+            <a:avLst/>
+          </a:prstGeom>
+          <a:solidFill>
+            <a:srgbClr val="A1887F"/>
+          </a:solidFill>
+          <a:ln>
+            <a:noFill/>
+          </a:ln>
+        </p:spPr>
+        <p:style>
+          <a:lnRef idx="2">
+            <a:schemeClr val="accent1">
+              <a:shade val="15000"/>
+            </a:schemeClr>
+          </a:lnRef>
+          <a:fillRef idx="1">
+            <a:schemeClr val="accent1"/>
+          </a:fillRef>
+          <a:effectRef idx="0">
+            <a:schemeClr val="accent1"/>
+          </a:effectRef>
+          <a:fontRef idx="minor">
+            <a:schemeClr val="lt1"/>
+          </a:fontRef>
+        </p:style>
+        <p:txBody>
+          <a:bodyPr rtlCol="0" anchor="ctr"/>
+          <a:lstStyle/>
+          <a:p>
+            <a:pPr algn="ctr"/>
+            <a:r>
+              <a:rPr lang="en-US" dirty="0">
+                <a:solidFill>
+                  <a:schemeClr val="bg1"/>
+                </a:solidFill>
+              </a:rPr>
+              <a:t>Delete</a:t>
+            </a:r>
+          </a:p>
+        </p:txBody>
+      </p:sp>
+    </p:spTree>
+    <p:extLst>
+      <p:ext uri="{BB962C8B-B14F-4D97-AF65-F5344CB8AC3E}">
+        <p14:creationId xmlns:p14="http://schemas.microsoft.com/office/powerpoint/2010/main" val="31636421"/>
+      </p:ext>
+    </p:extLst>
+  </p:cSld>
+  <p:clrMapOvr>
+    <a:masterClrMapping/>
+  </p:clrMapOvr>
+</p:sld>
+</file>
+
 <file path=ppt/theme/theme1.xml><?xml version="1.0" encoding="utf-8"?>
 <a:theme xmlns:a="http://schemas.openxmlformats.org/drawingml/2006/main" name="Office テーマ">
   <a:themeElements>

--- a/icon.pptx
+++ b/icon.pptx
@@ -6,8 +6,9 @@
   </p:sldMasterIdLst>
   <p:sldIdLst>
     <p:sldId id="256" r:id="rId2"/>
-    <p:sldId id="257" r:id="rId3"/>
-    <p:sldId id="258" r:id="rId4"/>
+    <p:sldId id="259" r:id="rId3"/>
+    <p:sldId id="257" r:id="rId4"/>
+    <p:sldId id="258" r:id="rId5"/>
   </p:sldIdLst>
   <p:sldSz cx="4873625" cy="4873625"/>
   <p:notesSz cx="6858000" cy="9144000"/>
@@ -245,7 +246,7 @@
           <a:p>
             <a:fld id="{6504D114-5DA0-4D81-A177-E103B8E1CDAA}" type="datetimeFigureOut">
               <a:rPr lang="en-US" smtClean="0"/>
-              <a:t>9/21/2026</a:t>
+              <a:t>9/22/2026</a:t>
             </a:fld>
             <a:endParaRPr lang="en-US"/>
           </a:p>
@@ -447,7 +448,7 @@
           <a:p>
             <a:fld id="{6504D114-5DA0-4D81-A177-E103B8E1CDAA}" type="datetimeFigureOut">
               <a:rPr lang="en-US" smtClean="0"/>
-              <a:t>9/21/2026</a:t>
+              <a:t>9/22/2026</a:t>
             </a:fld>
             <a:endParaRPr lang="en-US"/>
           </a:p>
@@ -659,7 +660,7 @@
           <a:p>
             <a:fld id="{6504D114-5DA0-4D81-A177-E103B8E1CDAA}" type="datetimeFigureOut">
               <a:rPr lang="en-US" smtClean="0"/>
-              <a:t>9/21/2026</a:t>
+              <a:t>9/22/2026</a:t>
             </a:fld>
             <a:endParaRPr lang="en-US"/>
           </a:p>
@@ -861,7 +862,7 @@
           <a:p>
             <a:fld id="{6504D114-5DA0-4D81-A177-E103B8E1CDAA}" type="datetimeFigureOut">
               <a:rPr lang="en-US" smtClean="0"/>
-              <a:t>9/21/2026</a:t>
+              <a:t>9/22/2026</a:t>
             </a:fld>
             <a:endParaRPr lang="en-US"/>
           </a:p>
@@ -1107,7 +1108,7 @@
           <a:p>
             <a:fld id="{6504D114-5DA0-4D81-A177-E103B8E1CDAA}" type="datetimeFigureOut">
               <a:rPr lang="en-US" smtClean="0"/>
-              <a:t>9/21/2026</a:t>
+              <a:t>9/22/2026</a:t>
             </a:fld>
             <a:endParaRPr lang="en-US"/>
           </a:p>
@@ -1403,7 +1404,7 @@
           <a:p>
             <a:fld id="{6504D114-5DA0-4D81-A177-E103B8E1CDAA}" type="datetimeFigureOut">
               <a:rPr lang="en-US" smtClean="0"/>
-              <a:t>9/21/2026</a:t>
+              <a:t>9/22/2026</a:t>
             </a:fld>
             <a:endParaRPr lang="en-US"/>
           </a:p>
@@ -1834,7 +1835,7 @@
           <a:p>
             <a:fld id="{6504D114-5DA0-4D81-A177-E103B8E1CDAA}" type="datetimeFigureOut">
               <a:rPr lang="en-US" smtClean="0"/>
-              <a:t>9/21/2026</a:t>
+              <a:t>9/22/2026</a:t>
             </a:fld>
             <a:endParaRPr lang="en-US"/>
           </a:p>
@@ -1952,7 +1953,7 @@
           <a:p>
             <a:fld id="{6504D114-5DA0-4D81-A177-E103B8E1CDAA}" type="datetimeFigureOut">
               <a:rPr lang="en-US" smtClean="0"/>
-              <a:t>9/21/2026</a:t>
+              <a:t>9/22/2026</a:t>
             </a:fld>
             <a:endParaRPr lang="en-US"/>
           </a:p>
@@ -2047,7 +2048,7 @@
           <a:p>
             <a:fld id="{6504D114-5DA0-4D81-A177-E103B8E1CDAA}" type="datetimeFigureOut">
               <a:rPr lang="en-US" smtClean="0"/>
-              <a:t>9/21/2026</a:t>
+              <a:t>9/22/2026</a:t>
             </a:fld>
             <a:endParaRPr lang="en-US"/>
           </a:p>
@@ -2356,7 +2357,7 @@
           <a:p>
             <a:fld id="{6504D114-5DA0-4D81-A177-E103B8E1CDAA}" type="datetimeFigureOut">
               <a:rPr lang="en-US" smtClean="0"/>
-              <a:t>9/21/2026</a:t>
+              <a:t>9/22/2026</a:t>
             </a:fld>
             <a:endParaRPr lang="en-US"/>
           </a:p>
@@ -2613,7 +2614,7 @@
           <a:p>
             <a:fld id="{6504D114-5DA0-4D81-A177-E103B8E1CDAA}" type="datetimeFigureOut">
               <a:rPr lang="en-US" smtClean="0"/>
-              <a:t>9/21/2026</a:t>
+              <a:t>9/22/2026</a:t>
             </a:fld>
             <a:endParaRPr lang="en-US"/>
           </a:p>
@@ -2858,7 +2859,7 @@
           <a:p>
             <a:fld id="{6504D114-5DA0-4D81-A177-E103B8E1CDAA}" type="datetimeFigureOut">
               <a:rPr lang="en-US" smtClean="0"/>
-              <a:t>9/21/2026</a:t>
+              <a:t>9/22/2026</a:t>
             </a:fld>
             <a:endParaRPr lang="en-US"/>
           </a:p>
@@ -3642,7 +3643,13 @@
   <p:cSld>
     <p:spTree>
       <p:nvGrpSpPr>
-        <p:cNvPr id="1" name=""/>
+        <p:cNvPr id="1" name="">
+          <a:extLst>
+            <a:ext uri="{FF2B5EF4-FFF2-40B4-BE49-F238E27FC236}">
+              <a16:creationId xmlns:a16="http://schemas.microsoft.com/office/drawing/2014/main" id="{050D8A48-11EF-8C55-B933-1CADCEBBDE76}"/>
+            </a:ext>
+          </a:extLst>
+        </p:cNvPr>
         <p:cNvGrpSpPr/>
         <p:nvPr/>
       </p:nvGrpSpPr>
@@ -3656,10 +3663,10 @@
       </p:grpSpPr>
       <p:pic>
         <p:nvPicPr>
-          <p:cNvPr id="3" name="図 2">
+          <p:cNvPr id="5" name="グラフィックス 4" descr="世界 枠線">
             <a:extLst>
               <a:ext uri="{FF2B5EF4-FFF2-40B4-BE49-F238E27FC236}">
-                <a16:creationId xmlns:a16="http://schemas.microsoft.com/office/drawing/2014/main" id="{BA243D3C-C4A4-365B-9EDA-5D36C7ADFAF2}"/>
+                <a16:creationId xmlns:a16="http://schemas.microsoft.com/office/drawing/2014/main" id="{2D5EAF5E-F68F-DBD7-3F3D-FACC837A4B1A}"/>
               </a:ext>
             </a:extLst>
           </p:cNvPr>
@@ -3669,47 +3676,93 @@
           <p:nvPr/>
         </p:nvPicPr>
         <p:blipFill>
-          <a:blip r:embed="rId2"/>
-          <a:srcRect r="18423" b="20951"/>
+          <a:blip>
+            <a:extLst>
+              <a:ext uri="{96DAC541-7B7A-43D3-8B79-37D633B846F1}">
+                <asvg:svgBlip xmlns:asvg="http://schemas.microsoft.com/office/drawing/2016/SVG/main" r:embed="rId2"/>
+              </a:ext>
+            </a:extLst>
+          </a:blip>
           <a:stretch>
             <a:fillRect/>
           </a:stretch>
         </p:blipFill>
         <p:spPr>
           <a:xfrm>
-            <a:off x="-16510" y="246221"/>
-            <a:ext cx="4873625" cy="3347248"/>
+            <a:off x="0" y="0"/>
+            <a:ext cx="4873625" cy="4873625"/>
           </a:xfrm>
           <a:prstGeom prst="rect">
             <a:avLst/>
           </a:prstGeom>
         </p:spPr>
       </p:pic>
+      <p:pic>
+        <p:nvPicPr>
+          <p:cNvPr id="23" name="グラフィックス 22" descr="離陸 単色塗りつぶし">
+            <a:extLst>
+              <a:ext uri="{FF2B5EF4-FFF2-40B4-BE49-F238E27FC236}">
+                <a16:creationId xmlns:a16="http://schemas.microsoft.com/office/drawing/2014/main" id="{28DF114A-5354-2215-834B-FA3EBB4F8990}"/>
+              </a:ext>
+            </a:extLst>
+          </p:cNvPr>
+          <p:cNvPicPr>
+            <a:picLocks noChangeAspect="1"/>
+          </p:cNvPicPr>
+          <p:nvPr/>
+        </p:nvPicPr>
+        <p:blipFill>
+          <a:blip>
+            <a:extLst>
+              <a:ext uri="{96DAC541-7B7A-43D3-8B79-37D633B846F1}">
+                <asvg:svgBlip xmlns:asvg="http://schemas.microsoft.com/office/drawing/2016/SVG/main" r:embed="rId3"/>
+              </a:ext>
+            </a:extLst>
+          </a:blip>
+          <a:srcRect b="31589"/>
+          <a:stretch>
+            <a:fillRect/>
+          </a:stretch>
+        </p:blipFill>
+        <p:spPr>
+          <a:xfrm rot="20582497">
+            <a:off x="239375" y="-106721"/>
+            <a:ext cx="1878760" cy="1285281"/>
+          </a:xfrm>
+          <a:prstGeom prst="rect">
+            <a:avLst/>
+          </a:prstGeom>
+        </p:spPr>
+      </p:pic>
       <p:sp>
         <p:nvSpPr>
           <p:cNvPr id="4" name="正方形/長方形 3">
             <a:extLst>
               <a:ext uri="{FF2B5EF4-FFF2-40B4-BE49-F238E27FC236}">
-                <a16:creationId xmlns:a16="http://schemas.microsoft.com/office/drawing/2014/main" id="{6DA8A918-04BC-A08F-380E-38BCB8E0A92F}"/>
+                <a16:creationId xmlns:a16="http://schemas.microsoft.com/office/drawing/2014/main" id="{99081647-7116-C255-0B1B-2BE3FBEEE1FC}"/>
               </a:ext>
             </a:extLst>
           </p:cNvPr>
-          <p:cNvSpPr/>
+          <p:cNvSpPr>
+            <a:spLocks noChangeAspect="1"/>
+          </p:cNvSpPr>
           <p:nvPr/>
         </p:nvSpPr>
         <p:spPr>
           <a:xfrm>
-            <a:off x="-1" y="3684905"/>
-            <a:ext cx="4873625" cy="1188720"/>
+            <a:off x="817722" y="1700559"/>
+            <a:ext cx="3238179" cy="1472505"/>
           </a:xfrm>
           <a:prstGeom prst="rect">
             <a:avLst/>
           </a:prstGeom>
           <a:solidFill>
-            <a:srgbClr val="A1887F"/>
+            <a:schemeClr val="bg1"/>
           </a:solidFill>
-          <a:ln>
-            <a:noFill/>
+          <a:ln w="133350">
+            <a:solidFill>
+              <a:srgbClr val="A1887F"/>
+            </a:solidFill>
           </a:ln>
         </p:spPr>
         <p:style>
@@ -3737,6 +3790,525 @@
           </a:p>
         </p:txBody>
       </p:sp>
+      <p:sp>
+        <p:nvSpPr>
+          <p:cNvPr id="6" name="楕円 5">
+            <a:extLst>
+              <a:ext uri="{FF2B5EF4-FFF2-40B4-BE49-F238E27FC236}">
+                <a16:creationId xmlns:a16="http://schemas.microsoft.com/office/drawing/2014/main" id="{B7B6FD44-A9D1-5DDB-1E1D-F85E7CE6DD87}"/>
+              </a:ext>
+            </a:extLst>
+          </p:cNvPr>
+          <p:cNvSpPr/>
+          <p:nvPr/>
+        </p:nvSpPr>
+        <p:spPr>
+          <a:xfrm>
+            <a:off x="2042291" y="1953862"/>
+            <a:ext cx="789039" cy="922372"/>
+          </a:xfrm>
+          <a:prstGeom prst="ellipse">
+            <a:avLst/>
+          </a:prstGeom>
+          <a:solidFill>
+            <a:srgbClr val="A1887F"/>
+          </a:solidFill>
+          <a:ln>
+            <a:solidFill>
+              <a:srgbClr val="A1887F"/>
+            </a:solidFill>
+          </a:ln>
+        </p:spPr>
+        <p:style>
+          <a:lnRef idx="2">
+            <a:schemeClr val="accent1">
+              <a:shade val="15000"/>
+            </a:schemeClr>
+          </a:lnRef>
+          <a:fillRef idx="1">
+            <a:schemeClr val="accent1"/>
+          </a:fillRef>
+          <a:effectRef idx="0">
+            <a:schemeClr val="accent1"/>
+          </a:effectRef>
+          <a:fontRef idx="minor">
+            <a:schemeClr val="lt1"/>
+          </a:fontRef>
+        </p:style>
+        <p:txBody>
+          <a:bodyPr rtlCol="0" anchor="ctr"/>
+          <a:lstStyle/>
+          <a:p>
+            <a:pPr algn="ctr"/>
+            <a:endParaRPr lang="en-US"/>
+          </a:p>
+        </p:txBody>
+      </p:sp>
+      <p:sp>
+        <p:nvSpPr>
+          <p:cNvPr id="8" name="楕円 7">
+            <a:extLst>
+              <a:ext uri="{FF2B5EF4-FFF2-40B4-BE49-F238E27FC236}">
+                <a16:creationId xmlns:a16="http://schemas.microsoft.com/office/drawing/2014/main" id="{82F8E75A-E1A7-A83F-0E41-DFC7914F4A88}"/>
+              </a:ext>
+            </a:extLst>
+          </p:cNvPr>
+          <p:cNvSpPr/>
+          <p:nvPr/>
+        </p:nvSpPr>
+        <p:spPr>
+          <a:xfrm>
+            <a:off x="1264720" y="2252456"/>
+            <a:ext cx="274320" cy="274320"/>
+          </a:xfrm>
+          <a:prstGeom prst="ellipse">
+            <a:avLst/>
+          </a:prstGeom>
+          <a:solidFill>
+            <a:srgbClr val="A1887F"/>
+          </a:solidFill>
+          <a:ln>
+            <a:solidFill>
+              <a:srgbClr val="A1887F"/>
+            </a:solidFill>
+          </a:ln>
+        </p:spPr>
+        <p:style>
+          <a:lnRef idx="2">
+            <a:schemeClr val="accent1">
+              <a:shade val="15000"/>
+            </a:schemeClr>
+          </a:lnRef>
+          <a:fillRef idx="1">
+            <a:schemeClr val="accent1"/>
+          </a:fillRef>
+          <a:effectRef idx="0">
+            <a:schemeClr val="accent1"/>
+          </a:effectRef>
+          <a:fontRef idx="minor">
+            <a:schemeClr val="lt1"/>
+          </a:fontRef>
+        </p:style>
+        <p:txBody>
+          <a:bodyPr rtlCol="0" anchor="ctr"/>
+          <a:lstStyle/>
+          <a:p>
+            <a:pPr algn="ctr"/>
+            <a:endParaRPr lang="en-US"/>
+          </a:p>
+        </p:txBody>
+      </p:sp>
+      <p:sp>
+        <p:nvSpPr>
+          <p:cNvPr id="12" name="楕円 11">
+            <a:extLst>
+              <a:ext uri="{FF2B5EF4-FFF2-40B4-BE49-F238E27FC236}">
+                <a16:creationId xmlns:a16="http://schemas.microsoft.com/office/drawing/2014/main" id="{B77498CA-C6B4-AB0A-4356-6F803717FFFD}"/>
+              </a:ext>
+            </a:extLst>
+          </p:cNvPr>
+          <p:cNvSpPr/>
+          <p:nvPr/>
+        </p:nvSpPr>
+        <p:spPr>
+          <a:xfrm>
+            <a:off x="3337831" y="2277887"/>
+            <a:ext cx="274320" cy="274320"/>
+          </a:xfrm>
+          <a:prstGeom prst="ellipse">
+            <a:avLst/>
+          </a:prstGeom>
+          <a:solidFill>
+            <a:srgbClr val="A1887F"/>
+          </a:solidFill>
+          <a:ln>
+            <a:solidFill>
+              <a:srgbClr val="A1887F"/>
+            </a:solidFill>
+          </a:ln>
+        </p:spPr>
+        <p:style>
+          <a:lnRef idx="2">
+            <a:schemeClr val="accent1">
+              <a:shade val="15000"/>
+            </a:schemeClr>
+          </a:lnRef>
+          <a:fillRef idx="1">
+            <a:schemeClr val="accent1"/>
+          </a:fillRef>
+          <a:effectRef idx="0">
+            <a:schemeClr val="accent1"/>
+          </a:effectRef>
+          <a:fontRef idx="minor">
+            <a:schemeClr val="lt1"/>
+          </a:fontRef>
+        </p:style>
+        <p:txBody>
+          <a:bodyPr rtlCol="0" anchor="ctr"/>
+          <a:lstStyle/>
+          <a:p>
+            <a:pPr algn="ctr"/>
+            <a:endParaRPr lang="en-US"/>
+          </a:p>
+        </p:txBody>
+      </p:sp>
+      <p:sp>
+        <p:nvSpPr>
+          <p:cNvPr id="14" name="部分円 13">
+            <a:extLst>
+              <a:ext uri="{FF2B5EF4-FFF2-40B4-BE49-F238E27FC236}">
+                <a16:creationId xmlns:a16="http://schemas.microsoft.com/office/drawing/2014/main" id="{AFDDCA3B-C043-3A06-64D4-CDCF5A90BCAB}"/>
+              </a:ext>
+            </a:extLst>
+          </p:cNvPr>
+          <p:cNvSpPr/>
+          <p:nvPr/>
+        </p:nvSpPr>
+        <p:spPr>
+          <a:xfrm>
+            <a:off x="3694864" y="1339524"/>
+            <a:ext cx="722070" cy="722070"/>
+          </a:xfrm>
+          <a:prstGeom prst="pie">
+            <a:avLst>
+              <a:gd name="adj1" fmla="val 5402462"/>
+              <a:gd name="adj2" fmla="val 10797014"/>
+            </a:avLst>
+          </a:prstGeom>
+          <a:solidFill>
+            <a:srgbClr val="A1887F"/>
+          </a:solidFill>
+          <a:ln>
+            <a:solidFill>
+              <a:srgbClr val="A1887F"/>
+            </a:solidFill>
+          </a:ln>
+        </p:spPr>
+        <p:style>
+          <a:lnRef idx="2">
+            <a:schemeClr val="accent1">
+              <a:shade val="15000"/>
+            </a:schemeClr>
+          </a:lnRef>
+          <a:fillRef idx="1">
+            <a:schemeClr val="accent1"/>
+          </a:fillRef>
+          <a:effectRef idx="0">
+            <a:schemeClr val="accent1"/>
+          </a:effectRef>
+          <a:fontRef idx="minor">
+            <a:schemeClr val="lt1"/>
+          </a:fontRef>
+        </p:style>
+        <p:txBody>
+          <a:bodyPr rtlCol="0" anchor="ctr"/>
+          <a:lstStyle/>
+          <a:p>
+            <a:pPr algn="ctr"/>
+            <a:endParaRPr lang="en-US">
+              <a:solidFill>
+                <a:schemeClr val="tx1"/>
+              </a:solidFill>
+            </a:endParaRPr>
+          </a:p>
+        </p:txBody>
+      </p:sp>
+      <p:sp>
+        <p:nvSpPr>
+          <p:cNvPr id="18" name="部分円 17">
+            <a:extLst>
+              <a:ext uri="{FF2B5EF4-FFF2-40B4-BE49-F238E27FC236}">
+                <a16:creationId xmlns:a16="http://schemas.microsoft.com/office/drawing/2014/main" id="{1E8B4BC1-709D-9BE7-6D6B-1ED91AEF1E78}"/>
+              </a:ext>
+            </a:extLst>
+          </p:cNvPr>
+          <p:cNvSpPr/>
+          <p:nvPr/>
+        </p:nvSpPr>
+        <p:spPr>
+          <a:xfrm rot="16200000">
+            <a:off x="469422" y="1339524"/>
+            <a:ext cx="722070" cy="722070"/>
+          </a:xfrm>
+          <a:prstGeom prst="pie">
+            <a:avLst>
+              <a:gd name="adj1" fmla="val 5402462"/>
+              <a:gd name="adj2" fmla="val 10797014"/>
+            </a:avLst>
+          </a:prstGeom>
+          <a:solidFill>
+            <a:srgbClr val="A1887F"/>
+          </a:solidFill>
+          <a:ln>
+            <a:solidFill>
+              <a:srgbClr val="A1887F"/>
+            </a:solidFill>
+          </a:ln>
+        </p:spPr>
+        <p:style>
+          <a:lnRef idx="2">
+            <a:schemeClr val="accent1">
+              <a:shade val="15000"/>
+            </a:schemeClr>
+          </a:lnRef>
+          <a:fillRef idx="1">
+            <a:schemeClr val="accent1"/>
+          </a:fillRef>
+          <a:effectRef idx="0">
+            <a:schemeClr val="accent1"/>
+          </a:effectRef>
+          <a:fontRef idx="minor">
+            <a:schemeClr val="lt1"/>
+          </a:fontRef>
+        </p:style>
+        <p:txBody>
+          <a:bodyPr rtlCol="0" anchor="ctr"/>
+          <a:lstStyle/>
+          <a:p>
+            <a:pPr algn="ctr"/>
+            <a:endParaRPr lang="en-US">
+              <a:solidFill>
+                <a:schemeClr val="tx1"/>
+              </a:solidFill>
+            </a:endParaRPr>
+          </a:p>
+        </p:txBody>
+      </p:sp>
+      <p:sp>
+        <p:nvSpPr>
+          <p:cNvPr id="22" name="部分円 21">
+            <a:extLst>
+              <a:ext uri="{FF2B5EF4-FFF2-40B4-BE49-F238E27FC236}">
+                <a16:creationId xmlns:a16="http://schemas.microsoft.com/office/drawing/2014/main" id="{997B205B-E14C-0033-CC1F-83167AB69B0C}"/>
+              </a:ext>
+            </a:extLst>
+          </p:cNvPr>
+          <p:cNvSpPr/>
+          <p:nvPr/>
+        </p:nvSpPr>
+        <p:spPr>
+          <a:xfrm rot="5400000" flipV="1">
+            <a:off x="456685" y="2812030"/>
+            <a:ext cx="722070" cy="722070"/>
+          </a:xfrm>
+          <a:prstGeom prst="pie">
+            <a:avLst>
+              <a:gd name="adj1" fmla="val 5402462"/>
+              <a:gd name="adj2" fmla="val 10797014"/>
+            </a:avLst>
+          </a:prstGeom>
+          <a:solidFill>
+            <a:srgbClr val="A1887F"/>
+          </a:solidFill>
+          <a:ln>
+            <a:solidFill>
+              <a:srgbClr val="A1887F"/>
+            </a:solidFill>
+          </a:ln>
+        </p:spPr>
+        <p:style>
+          <a:lnRef idx="2">
+            <a:schemeClr val="accent1">
+              <a:shade val="15000"/>
+            </a:schemeClr>
+          </a:lnRef>
+          <a:fillRef idx="1">
+            <a:schemeClr val="accent1"/>
+          </a:fillRef>
+          <a:effectRef idx="0">
+            <a:schemeClr val="accent1"/>
+          </a:effectRef>
+          <a:fontRef idx="minor">
+            <a:schemeClr val="lt1"/>
+          </a:fontRef>
+        </p:style>
+        <p:txBody>
+          <a:bodyPr rtlCol="0" anchor="ctr"/>
+          <a:lstStyle/>
+          <a:p>
+            <a:pPr algn="ctr"/>
+            <a:endParaRPr lang="en-US">
+              <a:solidFill>
+                <a:schemeClr val="tx1"/>
+              </a:solidFill>
+            </a:endParaRPr>
+          </a:p>
+        </p:txBody>
+      </p:sp>
+      <p:sp>
+        <p:nvSpPr>
+          <p:cNvPr id="25" name="部分円 24">
+            <a:extLst>
+              <a:ext uri="{FF2B5EF4-FFF2-40B4-BE49-F238E27FC236}">
+                <a16:creationId xmlns:a16="http://schemas.microsoft.com/office/drawing/2014/main" id="{4EB76C6A-083C-FF4A-04B9-1ADBBF7D8053}"/>
+              </a:ext>
+            </a:extLst>
+          </p:cNvPr>
+          <p:cNvSpPr/>
+          <p:nvPr/>
+        </p:nvSpPr>
+        <p:spPr>
+          <a:xfrm rot="16200000" flipH="1" flipV="1">
+            <a:off x="3694864" y="2812030"/>
+            <a:ext cx="722070" cy="722070"/>
+          </a:xfrm>
+          <a:prstGeom prst="pie">
+            <a:avLst>
+              <a:gd name="adj1" fmla="val 5402462"/>
+              <a:gd name="adj2" fmla="val 10797014"/>
+            </a:avLst>
+          </a:prstGeom>
+          <a:solidFill>
+            <a:srgbClr val="A1887F"/>
+          </a:solidFill>
+          <a:ln>
+            <a:solidFill>
+              <a:srgbClr val="A1887F"/>
+            </a:solidFill>
+          </a:ln>
+        </p:spPr>
+        <p:style>
+          <a:lnRef idx="2">
+            <a:schemeClr val="accent1">
+              <a:shade val="15000"/>
+            </a:schemeClr>
+          </a:lnRef>
+          <a:fillRef idx="1">
+            <a:schemeClr val="accent1"/>
+          </a:fillRef>
+          <a:effectRef idx="0">
+            <a:schemeClr val="accent1"/>
+          </a:effectRef>
+          <a:fontRef idx="minor">
+            <a:schemeClr val="lt1"/>
+          </a:fontRef>
+        </p:style>
+        <p:txBody>
+          <a:bodyPr rtlCol="0" anchor="ctr"/>
+          <a:lstStyle/>
+          <a:p>
+            <a:pPr algn="ctr"/>
+            <a:endParaRPr lang="en-US">
+              <a:solidFill>
+                <a:schemeClr val="tx1"/>
+              </a:solidFill>
+            </a:endParaRPr>
+          </a:p>
+        </p:txBody>
+      </p:sp>
+    </p:spTree>
+    <p:extLst>
+      <p:ext uri="{BB962C8B-B14F-4D97-AF65-F5344CB8AC3E}">
+        <p14:creationId xmlns:p14="http://schemas.microsoft.com/office/powerpoint/2010/main" val="1428051136"/>
+      </p:ext>
+    </p:extLst>
+  </p:cSld>
+  <p:clrMapOvr>
+    <a:masterClrMapping/>
+  </p:clrMapOvr>
+</p:sld>
+</file>
+
+<file path=ppt/slides/slide3.xml><?xml version="1.0" encoding="utf-8"?>
+<p:sld xmlns:a="http://schemas.openxmlformats.org/drawingml/2006/main" xmlns:r="http://schemas.openxmlformats.org/officeDocument/2006/relationships" xmlns:p="http://schemas.openxmlformats.org/presentationml/2006/main">
+  <p:cSld>
+    <p:spTree>
+      <p:nvGrpSpPr>
+        <p:cNvPr id="1" name=""/>
+        <p:cNvGrpSpPr/>
+        <p:nvPr/>
+      </p:nvGrpSpPr>
+      <p:grpSpPr>
+        <a:xfrm>
+          <a:off x="0" y="0"/>
+          <a:ext cx="0" cy="0"/>
+          <a:chOff x="0" y="0"/>
+          <a:chExt cx="0" cy="0"/>
+        </a:xfrm>
+      </p:grpSpPr>
+      <p:pic>
+        <p:nvPicPr>
+          <p:cNvPr id="3" name="図 2">
+            <a:extLst>
+              <a:ext uri="{FF2B5EF4-FFF2-40B4-BE49-F238E27FC236}">
+                <a16:creationId xmlns:a16="http://schemas.microsoft.com/office/drawing/2014/main" id="{BA243D3C-C4A4-365B-9EDA-5D36C7ADFAF2}"/>
+              </a:ext>
+            </a:extLst>
+          </p:cNvPr>
+          <p:cNvPicPr>
+            <a:picLocks noChangeAspect="1"/>
+          </p:cNvPicPr>
+          <p:nvPr/>
+        </p:nvPicPr>
+        <p:blipFill>
+          <a:blip r:embed="rId2"/>
+          <a:srcRect r="18423" b="20951"/>
+          <a:stretch>
+            <a:fillRect/>
+          </a:stretch>
+        </p:blipFill>
+        <p:spPr>
+          <a:xfrm>
+            <a:off x="-16510" y="246221"/>
+            <a:ext cx="4873625" cy="3347248"/>
+          </a:xfrm>
+          <a:prstGeom prst="rect">
+            <a:avLst/>
+          </a:prstGeom>
+        </p:spPr>
+      </p:pic>
+      <p:sp>
+        <p:nvSpPr>
+          <p:cNvPr id="4" name="正方形/長方形 3">
+            <a:extLst>
+              <a:ext uri="{FF2B5EF4-FFF2-40B4-BE49-F238E27FC236}">
+                <a16:creationId xmlns:a16="http://schemas.microsoft.com/office/drawing/2014/main" id="{6DA8A918-04BC-A08F-380E-38BCB8E0A92F}"/>
+              </a:ext>
+            </a:extLst>
+          </p:cNvPr>
+          <p:cNvSpPr/>
+          <p:nvPr/>
+        </p:nvSpPr>
+        <p:spPr>
+          <a:xfrm>
+            <a:off x="-1" y="3684905"/>
+            <a:ext cx="4873625" cy="1188720"/>
+          </a:xfrm>
+          <a:prstGeom prst="rect">
+            <a:avLst/>
+          </a:prstGeom>
+          <a:solidFill>
+            <a:srgbClr val="A1887F"/>
+          </a:solidFill>
+          <a:ln>
+            <a:noFill/>
+          </a:ln>
+        </p:spPr>
+        <p:style>
+          <a:lnRef idx="2">
+            <a:schemeClr val="accent1">
+              <a:shade val="15000"/>
+            </a:schemeClr>
+          </a:lnRef>
+          <a:fillRef idx="1">
+            <a:schemeClr val="accent1"/>
+          </a:fillRef>
+          <a:effectRef idx="0">
+            <a:schemeClr val="accent1"/>
+          </a:effectRef>
+          <a:fontRef idx="minor">
+            <a:schemeClr val="lt1"/>
+          </a:fontRef>
+        </p:style>
+        <p:txBody>
+          <a:bodyPr rtlCol="0" anchor="ctr"/>
+          <a:lstStyle/>
+          <a:p>
+            <a:pPr algn="ctr"/>
+            <a:endParaRPr lang="en-US"/>
+          </a:p>
+        </p:txBody>
+      </p:sp>
       <p:pic>
         <p:nvPicPr>
           <p:cNvPr id="6" name="グラフィックス 5" descr="鉛筆 単色塗りつぶし">
@@ -4140,7 +4712,7 @@
 </p:sld>
 </file>
 
-<file path=ppt/slides/slide3.xml><?xml version="1.0" encoding="utf-8"?>
+<file path=ppt/slides/slide4.xml><?xml version="1.0" encoding="utf-8"?>
 <p:sld xmlns:a="http://schemas.openxmlformats.org/drawingml/2006/main" xmlns:r="http://schemas.openxmlformats.org/officeDocument/2006/relationships" xmlns:p="http://schemas.openxmlformats.org/presentationml/2006/main">
   <p:cSld>
     <p:spTree>
@@ -4925,6 +5497,57 @@
               </a:rPr>
               <a:t>Delete</a:t>
             </a:r>
+          </a:p>
+        </p:txBody>
+      </p:sp>
+      <p:sp>
+        <p:nvSpPr>
+          <p:cNvPr id="9" name="正方形/長方形 8">
+            <a:extLst>
+              <a:ext uri="{FF2B5EF4-FFF2-40B4-BE49-F238E27FC236}">
+                <a16:creationId xmlns:a16="http://schemas.microsoft.com/office/drawing/2014/main" id="{7E5C6DEB-8B9F-68B2-AB14-BEDA5F44C979}"/>
+              </a:ext>
+            </a:extLst>
+          </p:cNvPr>
+          <p:cNvSpPr/>
+          <p:nvPr/>
+        </p:nvSpPr>
+        <p:spPr>
+          <a:xfrm>
+            <a:off x="2436812" y="-721360"/>
+            <a:ext cx="1068388" cy="396397"/>
+          </a:xfrm>
+          <a:prstGeom prst="rect">
+            <a:avLst/>
+          </a:prstGeom>
+          <a:ln>
+            <a:solidFill>
+              <a:srgbClr val="D7CCC8"/>
+            </a:solidFill>
+          </a:ln>
+        </p:spPr>
+        <p:style>
+          <a:lnRef idx="2">
+            <a:schemeClr val="accent1">
+              <a:shade val="15000"/>
+            </a:schemeClr>
+          </a:lnRef>
+          <a:fillRef idx="1">
+            <a:schemeClr val="accent1"/>
+          </a:fillRef>
+          <a:effectRef idx="0">
+            <a:schemeClr val="accent1"/>
+          </a:effectRef>
+          <a:fontRef idx="minor">
+            <a:schemeClr val="lt1"/>
+          </a:fontRef>
+        </p:style>
+        <p:txBody>
+          <a:bodyPr rtlCol="0" anchor="ctr"/>
+          <a:lstStyle/>
+          <a:p>
+            <a:pPr algn="ctr"/>
+            <a:endParaRPr lang="en-US"/>
           </a:p>
         </p:txBody>
       </p:sp>

--- a/icon.pptx
+++ b/icon.pptx
@@ -3719,15 +3719,15 @@
               </a:ext>
             </a:extLst>
           </a:blip>
-          <a:srcRect b="31589"/>
+          <a:srcRect t="19352" b="31589"/>
           <a:stretch>
             <a:fillRect/>
           </a:stretch>
         </p:blipFill>
         <p:spPr>
           <a:xfrm rot="20582497">
-            <a:off x="239375" y="-106721"/>
-            <a:ext cx="1878760" cy="1285281"/>
+            <a:off x="292400" y="248959"/>
+            <a:ext cx="1878760" cy="921696"/>
           </a:xfrm>
           <a:prstGeom prst="rect">
             <a:avLst/>
@@ -4226,37 +4226,6 @@
           <a:chExt cx="0" cy="0"/>
         </a:xfrm>
       </p:grpSpPr>
-      <p:pic>
-        <p:nvPicPr>
-          <p:cNvPr id="3" name="図 2">
-            <a:extLst>
-              <a:ext uri="{FF2B5EF4-FFF2-40B4-BE49-F238E27FC236}">
-                <a16:creationId xmlns:a16="http://schemas.microsoft.com/office/drawing/2014/main" id="{BA243D3C-C4A4-365B-9EDA-5D36C7ADFAF2}"/>
-              </a:ext>
-            </a:extLst>
-          </p:cNvPr>
-          <p:cNvPicPr>
-            <a:picLocks noChangeAspect="1"/>
-          </p:cNvPicPr>
-          <p:nvPr/>
-        </p:nvPicPr>
-        <p:blipFill>
-          <a:blip r:embed="rId2"/>
-          <a:srcRect r="18423" b="20951"/>
-          <a:stretch>
-            <a:fillRect/>
-          </a:stretch>
-        </p:blipFill>
-        <p:spPr>
-          <a:xfrm>
-            <a:off x="-16510" y="246221"/>
-            <a:ext cx="4873625" cy="3347248"/>
-          </a:xfrm>
-          <a:prstGeom prst="rect">
-            <a:avLst/>
-          </a:prstGeom>
-        </p:spPr>
-      </p:pic>
       <p:sp>
         <p:nvSpPr>
           <p:cNvPr id="4" name="正方形/長方形 3">
@@ -4327,7 +4296,7 @@
           <a:blip>
             <a:extLst>
               <a:ext uri="{96DAC541-7B7A-43D3-8B79-37D633B846F1}">
-                <asvg:svgBlip xmlns:asvg="http://schemas.microsoft.com/office/drawing/2016/SVG/main" r:embed="rId3"/>
+                <asvg:svgBlip xmlns:asvg="http://schemas.microsoft.com/office/drawing/2016/SVG/main" r:embed="rId2"/>
               </a:ext>
             </a:extLst>
           </a:blip>
@@ -4363,7 +4332,7 @@
           <a:blip>
             <a:extLst>
               <a:ext uri="{96DAC541-7B7A-43D3-8B79-37D633B846F1}">
-                <asvg:svgBlip xmlns:asvg="http://schemas.microsoft.com/office/drawing/2016/SVG/main" r:embed="rId4"/>
+                <asvg:svgBlip xmlns:asvg="http://schemas.microsoft.com/office/drawing/2016/SVG/main" r:embed="rId3"/>
               </a:ext>
             </a:extLst>
           </a:blip>
@@ -4373,7 +4342,7 @@
         </p:blipFill>
         <p:spPr>
           <a:xfrm>
-            <a:off x="989805" y="3684905"/>
+            <a:off x="989803" y="3684905"/>
             <a:ext cx="914400" cy="914400"/>
           </a:xfrm>
           <a:prstGeom prst="rect">
@@ -4399,7 +4368,7 @@
           <a:blip>
             <a:extLst>
               <a:ext uri="{96DAC541-7B7A-43D3-8B79-37D633B846F1}">
-                <asvg:svgBlip xmlns:asvg="http://schemas.microsoft.com/office/drawing/2016/SVG/main" r:embed="rId5"/>
+                <asvg:svgBlip xmlns:asvg="http://schemas.microsoft.com/office/drawing/2016/SVG/main" r:embed="rId4"/>
               </a:ext>
             </a:extLst>
           </a:blip>
@@ -4435,7 +4404,7 @@
           <a:blip>
             <a:extLst>
               <a:ext uri="{96DAC541-7B7A-43D3-8B79-37D633B846F1}">
-                <asvg:svgBlip xmlns:asvg="http://schemas.microsoft.com/office/drawing/2016/SVG/main" r:embed="rId6"/>
+                <asvg:svgBlip xmlns:asvg="http://schemas.microsoft.com/office/drawing/2016/SVG/main" r:embed="rId5"/>
               </a:ext>
             </a:extLst>
           </a:blip>
@@ -4471,7 +4440,7 @@
           <a:blip>
             <a:extLst>
               <a:ext uri="{96DAC541-7B7A-43D3-8B79-37D633B846F1}">
-                <asvg:svgBlip xmlns:asvg="http://schemas.microsoft.com/office/drawing/2016/SVG/main" r:embed="rId7"/>
+                <asvg:svgBlip xmlns:asvg="http://schemas.microsoft.com/office/drawing/2016/SVG/main" r:embed="rId6"/>
               </a:ext>
             </a:extLst>
           </a:blip>
@@ -4699,6 +4668,711 @@
           </a:p>
         </p:txBody>
       </p:sp>
+      <p:grpSp>
+        <p:nvGrpSpPr>
+          <p:cNvPr id="83" name="グループ化 82">
+            <a:extLst>
+              <a:ext uri="{FF2B5EF4-FFF2-40B4-BE49-F238E27FC236}">
+                <a16:creationId xmlns:a16="http://schemas.microsoft.com/office/drawing/2014/main" id="{14BAA0CE-3153-8E82-3645-80952BEE267E}"/>
+              </a:ext>
+            </a:extLst>
+          </p:cNvPr>
+          <p:cNvGrpSpPr/>
+          <p:nvPr/>
+        </p:nvGrpSpPr>
+        <p:grpSpPr>
+          <a:xfrm>
+            <a:off x="-2" y="0"/>
+            <a:ext cx="4873628" cy="1188720"/>
+            <a:chOff x="-2" y="1568132"/>
+            <a:chExt cx="4873628" cy="1188720"/>
+          </a:xfrm>
+        </p:grpSpPr>
+        <p:sp>
+          <p:nvSpPr>
+            <p:cNvPr id="38" name="正方形/長方形 37">
+              <a:extLst>
+                <a:ext uri="{FF2B5EF4-FFF2-40B4-BE49-F238E27FC236}">
+                  <a16:creationId xmlns:a16="http://schemas.microsoft.com/office/drawing/2014/main" id="{F6381EF7-3B4E-EC43-AA71-731E41466734}"/>
+                </a:ext>
+              </a:extLst>
+            </p:cNvPr>
+            <p:cNvSpPr/>
+            <p:nvPr/>
+          </p:nvSpPr>
+          <p:spPr>
+            <a:xfrm>
+              <a:off x="0" y="1568132"/>
+              <a:ext cx="4873625" cy="1188720"/>
+            </a:xfrm>
+            <a:prstGeom prst="rect">
+              <a:avLst/>
+            </a:prstGeom>
+            <a:solidFill>
+              <a:schemeClr val="bg1"/>
+            </a:solidFill>
+            <a:ln>
+              <a:noFill/>
+            </a:ln>
+          </p:spPr>
+          <p:style>
+            <a:lnRef idx="2">
+              <a:schemeClr val="accent1">
+                <a:shade val="15000"/>
+              </a:schemeClr>
+            </a:lnRef>
+            <a:fillRef idx="1">
+              <a:schemeClr val="accent1"/>
+            </a:fillRef>
+            <a:effectRef idx="0">
+              <a:schemeClr val="accent1"/>
+            </a:effectRef>
+            <a:fontRef idx="minor">
+              <a:schemeClr val="lt1"/>
+            </a:fontRef>
+          </p:style>
+          <p:txBody>
+            <a:bodyPr rtlCol="0" anchor="ctr"/>
+            <a:lstStyle/>
+            <a:p>
+              <a:pPr algn="ctr"/>
+              <a:endParaRPr lang="en-US"/>
+            </a:p>
+          </p:txBody>
+        </p:sp>
+        <p:sp>
+          <p:nvSpPr>
+            <p:cNvPr id="61" name="四角形: 角を丸くする 60">
+              <a:extLst>
+                <a:ext uri="{FF2B5EF4-FFF2-40B4-BE49-F238E27FC236}">
+                  <a16:creationId xmlns:a16="http://schemas.microsoft.com/office/drawing/2014/main" id="{5AB1A1E3-668C-52F5-AF91-CF761AD78D53}"/>
+                </a:ext>
+              </a:extLst>
+            </p:cNvPr>
+            <p:cNvSpPr/>
+            <p:nvPr/>
+          </p:nvSpPr>
+          <p:spPr>
+            <a:xfrm>
+              <a:off x="-2" y="1582182"/>
+              <a:ext cx="914400" cy="1174670"/>
+            </a:xfrm>
+            <a:prstGeom prst="roundRect">
+              <a:avLst/>
+            </a:prstGeom>
+            <a:solidFill>
+              <a:srgbClr val="A1887F"/>
+            </a:solidFill>
+            <a:ln>
+              <a:solidFill>
+                <a:srgbClr val="A1887F"/>
+              </a:solidFill>
+            </a:ln>
+          </p:spPr>
+          <p:style>
+            <a:lnRef idx="2">
+              <a:schemeClr val="accent1">
+                <a:shade val="15000"/>
+              </a:schemeClr>
+            </a:lnRef>
+            <a:fillRef idx="1">
+              <a:schemeClr val="accent1"/>
+            </a:fillRef>
+            <a:effectRef idx="0">
+              <a:schemeClr val="accent1"/>
+            </a:effectRef>
+            <a:fontRef idx="minor">
+              <a:schemeClr val="lt1"/>
+            </a:fontRef>
+          </p:style>
+          <p:txBody>
+            <a:bodyPr rtlCol="0" anchor="ctr"/>
+            <a:lstStyle/>
+            <a:p>
+              <a:pPr algn="ctr"/>
+              <a:endParaRPr lang="en-US" dirty="0"/>
+            </a:p>
+          </p:txBody>
+        </p:sp>
+        <p:pic>
+          <p:nvPicPr>
+            <p:cNvPr id="40" name="グラフィックス 39" descr="鉛筆 単色塗りつぶし">
+              <a:extLst>
+                <a:ext uri="{FF2B5EF4-FFF2-40B4-BE49-F238E27FC236}">
+                  <a16:creationId xmlns:a16="http://schemas.microsoft.com/office/drawing/2014/main" id="{B69F3C9A-B4A9-1D49-7C1A-857A27FE628E}"/>
+                </a:ext>
+              </a:extLst>
+            </p:cNvPr>
+            <p:cNvPicPr>
+              <a:picLocks noChangeAspect="1"/>
+            </p:cNvPicPr>
+            <p:nvPr/>
+          </p:nvPicPr>
+          <p:blipFill>
+            <a:blip>
+              <a:extLst>
+                <a:ext uri="{96DAC541-7B7A-43D3-8B79-37D633B846F1}">
+                  <asvg:svgBlip xmlns:asvg="http://schemas.microsoft.com/office/drawing/2016/SVG/main" r:embed="rId7"/>
+                </a:ext>
+              </a:extLst>
+            </a:blip>
+            <a:stretch>
+              <a:fillRect/>
+            </a:stretch>
+          </p:blipFill>
+          <p:spPr>
+            <a:xfrm>
+              <a:off x="0" y="1568132"/>
+              <a:ext cx="914400" cy="914400"/>
+            </a:xfrm>
+            <a:prstGeom prst="rect">
+              <a:avLst/>
+            </a:prstGeom>
+          </p:spPr>
+        </p:pic>
+        <p:pic>
+          <p:nvPicPr>
+            <p:cNvPr id="42" name="グラフィックス 41" descr="フリップ式カレンダー 単色塗りつぶし">
+              <a:extLst>
+                <a:ext uri="{FF2B5EF4-FFF2-40B4-BE49-F238E27FC236}">
+                  <a16:creationId xmlns:a16="http://schemas.microsoft.com/office/drawing/2014/main" id="{FCC39E5F-12E3-4580-C33E-A4CC2C58EC9E}"/>
+                </a:ext>
+              </a:extLst>
+            </p:cNvPr>
+            <p:cNvPicPr>
+              <a:picLocks noChangeAspect="1"/>
+            </p:cNvPicPr>
+            <p:nvPr/>
+          </p:nvPicPr>
+          <p:blipFill>
+            <a:blip>
+              <a:extLst>
+                <a:ext uri="{96DAC541-7B7A-43D3-8B79-37D633B846F1}">
+                  <asvg:svgBlip xmlns:asvg="http://schemas.microsoft.com/office/drawing/2016/SVG/main" r:embed="rId8"/>
+                </a:ext>
+              </a:extLst>
+            </a:blip>
+            <a:stretch>
+              <a:fillRect/>
+            </a:stretch>
+          </p:blipFill>
+          <p:spPr>
+            <a:xfrm>
+              <a:off x="989806" y="1568132"/>
+              <a:ext cx="914400" cy="914400"/>
+            </a:xfrm>
+            <a:prstGeom prst="rect">
+              <a:avLst/>
+            </a:prstGeom>
+          </p:spPr>
+        </p:pic>
+        <p:pic>
+          <p:nvPicPr>
+            <p:cNvPr id="44" name="グラフィックス 43" descr="ドキュメント 単色塗りつぶし">
+              <a:extLst>
+                <a:ext uri="{FF2B5EF4-FFF2-40B4-BE49-F238E27FC236}">
+                  <a16:creationId xmlns:a16="http://schemas.microsoft.com/office/drawing/2014/main" id="{B3450BC4-8FA9-1B90-EF3E-01406A8CF0D0}"/>
+                </a:ext>
+              </a:extLst>
+            </p:cNvPr>
+            <p:cNvPicPr>
+              <a:picLocks noChangeAspect="1"/>
+            </p:cNvPicPr>
+            <p:nvPr/>
+          </p:nvPicPr>
+          <p:blipFill>
+            <a:blip>
+              <a:extLst>
+                <a:ext uri="{96DAC541-7B7A-43D3-8B79-37D633B846F1}">
+                  <asvg:svgBlip xmlns:asvg="http://schemas.microsoft.com/office/drawing/2016/SVG/main" r:embed="rId9"/>
+                </a:ext>
+              </a:extLst>
+            </a:blip>
+            <a:stretch>
+              <a:fillRect/>
+            </a:stretch>
+          </p:blipFill>
+          <p:spPr>
+            <a:xfrm>
+              <a:off x="1979612" y="1568132"/>
+              <a:ext cx="914400" cy="914400"/>
+            </a:xfrm>
+            <a:prstGeom prst="rect">
+              <a:avLst/>
+            </a:prstGeom>
+          </p:spPr>
+        </p:pic>
+        <p:pic>
+          <p:nvPicPr>
+            <p:cNvPr id="46" name="グラフィックス 45" descr="時計 単色塗りつぶし">
+              <a:extLst>
+                <a:ext uri="{FF2B5EF4-FFF2-40B4-BE49-F238E27FC236}">
+                  <a16:creationId xmlns:a16="http://schemas.microsoft.com/office/drawing/2014/main" id="{B6414E15-5D3F-9EA6-4681-A64758AA1EB0}"/>
+                </a:ext>
+              </a:extLst>
+            </p:cNvPr>
+            <p:cNvPicPr>
+              <a:picLocks noChangeAspect="1"/>
+            </p:cNvPicPr>
+            <p:nvPr/>
+          </p:nvPicPr>
+          <p:blipFill>
+            <a:blip>
+              <a:extLst>
+                <a:ext uri="{96DAC541-7B7A-43D3-8B79-37D633B846F1}">
+                  <asvg:svgBlip xmlns:asvg="http://schemas.microsoft.com/office/drawing/2016/SVG/main" r:embed="rId10"/>
+                </a:ext>
+              </a:extLst>
+            </a:blip>
+            <a:stretch>
+              <a:fillRect/>
+            </a:stretch>
+          </p:blipFill>
+          <p:spPr>
+            <a:xfrm>
+              <a:off x="2969418" y="1568132"/>
+              <a:ext cx="914400" cy="914400"/>
+            </a:xfrm>
+            <a:prstGeom prst="rect">
+              <a:avLst/>
+            </a:prstGeom>
+          </p:spPr>
+        </p:pic>
+        <p:pic>
+          <p:nvPicPr>
+            <p:cNvPr id="48" name="グラフィックス 47" descr="歯車 1 つ 単色塗りつぶし">
+              <a:extLst>
+                <a:ext uri="{FF2B5EF4-FFF2-40B4-BE49-F238E27FC236}">
+                  <a16:creationId xmlns:a16="http://schemas.microsoft.com/office/drawing/2014/main" id="{57ABAB16-F772-8D7B-9777-3C3648591E79}"/>
+                </a:ext>
+              </a:extLst>
+            </p:cNvPr>
+            <p:cNvPicPr>
+              <a:picLocks noChangeAspect="1"/>
+            </p:cNvPicPr>
+            <p:nvPr/>
+          </p:nvPicPr>
+          <p:blipFill>
+            <a:blip>
+              <a:extLst>
+                <a:ext uri="{96DAC541-7B7A-43D3-8B79-37D633B846F1}">
+                  <asvg:svgBlip xmlns:asvg="http://schemas.microsoft.com/office/drawing/2016/SVG/main" r:embed="rId11"/>
+                </a:ext>
+              </a:extLst>
+            </a:blip>
+            <a:stretch>
+              <a:fillRect/>
+            </a:stretch>
+          </p:blipFill>
+          <p:spPr>
+            <a:xfrm>
+              <a:off x="3959226" y="1568132"/>
+              <a:ext cx="914400" cy="914400"/>
+            </a:xfrm>
+            <a:prstGeom prst="rect">
+              <a:avLst/>
+            </a:prstGeom>
+          </p:spPr>
+        </p:pic>
+        <p:sp>
+          <p:nvSpPr>
+            <p:cNvPr id="50" name="テキスト ボックス 49">
+              <a:extLst>
+                <a:ext uri="{FF2B5EF4-FFF2-40B4-BE49-F238E27FC236}">
+                  <a16:creationId xmlns:a16="http://schemas.microsoft.com/office/drawing/2014/main" id="{51533557-67BB-4106-78E4-73065E3D3AB6}"/>
+                </a:ext>
+              </a:extLst>
+            </p:cNvPr>
+            <p:cNvSpPr txBox="1"/>
+            <p:nvPr/>
+          </p:nvSpPr>
+          <p:spPr>
+            <a:xfrm>
+              <a:off x="1" y="2510631"/>
+              <a:ext cx="914400" cy="246221"/>
+            </a:xfrm>
+            <a:prstGeom prst="rect">
+              <a:avLst/>
+            </a:prstGeom>
+            <a:noFill/>
+          </p:spPr>
+          <p:txBody>
+            <a:bodyPr wrap="square" lIns="0" tIns="0" rIns="0" bIns="0" rtlCol="0">
+              <a:spAutoFit/>
+            </a:bodyPr>
+            <a:lstStyle/>
+            <a:p>
+              <a:pPr algn="ctr"/>
+              <a:r>
+                <a:rPr lang="en-US" sz="1600" dirty="0">
+                  <a:solidFill>
+                    <a:schemeClr val="bg1"/>
+                  </a:solidFill>
+                  <a:latin typeface="Arial" panose="020B0604020202020204" pitchFamily="34" charset="0"/>
+                  <a:cs typeface="Arial" panose="020B0604020202020204" pitchFamily="34" charset="0"/>
+                </a:rPr>
+                <a:t>Input</a:t>
+              </a:r>
+            </a:p>
+          </p:txBody>
+        </p:sp>
+        <p:sp>
+          <p:nvSpPr>
+            <p:cNvPr id="52" name="テキスト ボックス 51">
+              <a:extLst>
+                <a:ext uri="{FF2B5EF4-FFF2-40B4-BE49-F238E27FC236}">
+                  <a16:creationId xmlns:a16="http://schemas.microsoft.com/office/drawing/2014/main" id="{AD50211E-4572-3A9E-713E-26F94D0EF84D}"/>
+                </a:ext>
+              </a:extLst>
+            </p:cNvPr>
+            <p:cNvSpPr txBox="1"/>
+            <p:nvPr/>
+          </p:nvSpPr>
+          <p:spPr>
+            <a:xfrm>
+              <a:off x="989807" y="2510631"/>
+              <a:ext cx="914400" cy="246221"/>
+            </a:xfrm>
+            <a:prstGeom prst="rect">
+              <a:avLst/>
+            </a:prstGeom>
+            <a:noFill/>
+          </p:spPr>
+          <p:txBody>
+            <a:bodyPr wrap="square" lIns="0" tIns="0" rIns="0" bIns="0" rtlCol="0">
+              <a:spAutoFit/>
+            </a:bodyPr>
+            <a:lstStyle/>
+            <a:p>
+              <a:pPr algn="ctr"/>
+              <a:r>
+                <a:rPr lang="en-US" sz="1600" dirty="0">
+                  <a:solidFill>
+                    <a:schemeClr val="bg1">
+                      <a:lumMod val="65000"/>
+                    </a:schemeClr>
+                  </a:solidFill>
+                  <a:latin typeface="Arial" panose="020B0604020202020204" pitchFamily="34" charset="0"/>
+                  <a:cs typeface="Arial" panose="020B0604020202020204" pitchFamily="34" charset="0"/>
+                </a:rPr>
+                <a:t>Calendar</a:t>
+              </a:r>
+            </a:p>
+          </p:txBody>
+        </p:sp>
+        <p:sp>
+          <p:nvSpPr>
+            <p:cNvPr id="54" name="テキスト ボックス 53">
+              <a:extLst>
+                <a:ext uri="{FF2B5EF4-FFF2-40B4-BE49-F238E27FC236}">
+                  <a16:creationId xmlns:a16="http://schemas.microsoft.com/office/drawing/2014/main" id="{6B06F418-8E10-4904-D265-CBF15D619582}"/>
+                </a:ext>
+              </a:extLst>
+            </p:cNvPr>
+            <p:cNvSpPr txBox="1"/>
+            <p:nvPr/>
+          </p:nvSpPr>
+          <p:spPr>
+            <a:xfrm>
+              <a:off x="1979612" y="2510631"/>
+              <a:ext cx="914400" cy="246221"/>
+            </a:xfrm>
+            <a:prstGeom prst="rect">
+              <a:avLst/>
+            </a:prstGeom>
+            <a:noFill/>
+          </p:spPr>
+          <p:txBody>
+            <a:bodyPr wrap="square" lIns="0" tIns="0" rIns="0" bIns="0" rtlCol="0">
+              <a:spAutoFit/>
+            </a:bodyPr>
+            <a:lstStyle/>
+            <a:p>
+              <a:pPr algn="ctr"/>
+              <a:r>
+                <a:rPr lang="en-US" sz="1600" dirty="0">
+                  <a:solidFill>
+                    <a:schemeClr val="bg1">
+                      <a:lumMod val="65000"/>
+                    </a:schemeClr>
+                  </a:solidFill>
+                  <a:latin typeface="Arial" panose="020B0604020202020204" pitchFamily="34" charset="0"/>
+                  <a:cs typeface="Arial" panose="020B0604020202020204" pitchFamily="34" charset="0"/>
+                </a:rPr>
+                <a:t>Summary</a:t>
+              </a:r>
+            </a:p>
+          </p:txBody>
+        </p:sp>
+        <p:sp>
+          <p:nvSpPr>
+            <p:cNvPr id="56" name="テキスト ボックス 55">
+              <a:extLst>
+                <a:ext uri="{FF2B5EF4-FFF2-40B4-BE49-F238E27FC236}">
+                  <a16:creationId xmlns:a16="http://schemas.microsoft.com/office/drawing/2014/main" id="{312FBC20-DBB8-715E-4FAD-F82045FE1D7C}"/>
+                </a:ext>
+              </a:extLst>
+            </p:cNvPr>
+            <p:cNvSpPr txBox="1"/>
+            <p:nvPr/>
+          </p:nvSpPr>
+          <p:spPr>
+            <a:xfrm>
+              <a:off x="2969419" y="2510631"/>
+              <a:ext cx="914400" cy="246221"/>
+            </a:xfrm>
+            <a:prstGeom prst="rect">
+              <a:avLst/>
+            </a:prstGeom>
+            <a:noFill/>
+          </p:spPr>
+          <p:txBody>
+            <a:bodyPr wrap="square" lIns="0" tIns="0" rIns="0" bIns="0" rtlCol="0">
+              <a:spAutoFit/>
+            </a:bodyPr>
+            <a:lstStyle/>
+            <a:p>
+              <a:pPr algn="ctr"/>
+              <a:r>
+                <a:rPr lang="en-US" sz="1600" dirty="0">
+                  <a:solidFill>
+                    <a:schemeClr val="bg1">
+                      <a:lumMod val="65000"/>
+                    </a:schemeClr>
+                  </a:solidFill>
+                  <a:latin typeface="Arial" panose="020B0604020202020204" pitchFamily="34" charset="0"/>
+                  <a:cs typeface="Arial" panose="020B0604020202020204" pitchFamily="34" charset="0"/>
+                </a:rPr>
+                <a:t>History</a:t>
+              </a:r>
+            </a:p>
+          </p:txBody>
+        </p:sp>
+        <p:sp>
+          <p:nvSpPr>
+            <p:cNvPr id="58" name="テキスト ボックス 57">
+              <a:extLst>
+                <a:ext uri="{FF2B5EF4-FFF2-40B4-BE49-F238E27FC236}">
+                  <a16:creationId xmlns:a16="http://schemas.microsoft.com/office/drawing/2014/main" id="{6179725F-23EA-A4FF-875F-14C3F836628E}"/>
+                </a:ext>
+              </a:extLst>
+            </p:cNvPr>
+            <p:cNvSpPr txBox="1"/>
+            <p:nvPr/>
+          </p:nvSpPr>
+          <p:spPr>
+            <a:xfrm>
+              <a:off x="3959226" y="2510631"/>
+              <a:ext cx="914400" cy="246221"/>
+            </a:xfrm>
+            <a:prstGeom prst="rect">
+              <a:avLst/>
+            </a:prstGeom>
+            <a:noFill/>
+          </p:spPr>
+          <p:txBody>
+            <a:bodyPr wrap="square" lIns="0" tIns="0" rIns="0" bIns="0" rtlCol="0">
+              <a:spAutoFit/>
+            </a:bodyPr>
+            <a:lstStyle/>
+            <a:p>
+              <a:pPr algn="ctr"/>
+              <a:r>
+                <a:rPr lang="en-US" sz="1600" dirty="0">
+                  <a:solidFill>
+                    <a:schemeClr val="bg1">
+                      <a:lumMod val="65000"/>
+                    </a:schemeClr>
+                  </a:solidFill>
+                  <a:latin typeface="Arial" panose="020B0604020202020204" pitchFamily="34" charset="0"/>
+                  <a:cs typeface="Arial" panose="020B0604020202020204" pitchFamily="34" charset="0"/>
+                </a:rPr>
+                <a:t>Setting</a:t>
+              </a:r>
+            </a:p>
+          </p:txBody>
+        </p:sp>
+      </p:grpSp>
+      <p:pic>
+        <p:nvPicPr>
+          <p:cNvPr id="73" name="グラフィックス 72" descr="鉛筆 単色塗りつぶし">
+            <a:extLst>
+              <a:ext uri="{FF2B5EF4-FFF2-40B4-BE49-F238E27FC236}">
+                <a16:creationId xmlns:a16="http://schemas.microsoft.com/office/drawing/2014/main" id="{E210FD0A-07D3-8CB3-9DD3-182728D1D6D7}"/>
+              </a:ext>
+            </a:extLst>
+          </p:cNvPr>
+          <p:cNvPicPr>
+            <a:picLocks noChangeAspect="1"/>
+          </p:cNvPicPr>
+          <p:nvPr/>
+        </p:nvPicPr>
+        <p:blipFill>
+          <a:blip>
+            <a:extLst>
+              <a:ext uri="{96DAC541-7B7A-43D3-8B79-37D633B846F1}">
+                <asvg:svgBlip xmlns:asvg="http://schemas.microsoft.com/office/drawing/2016/SVG/main" r:embed="rId12"/>
+              </a:ext>
+            </a:extLst>
+          </a:blip>
+          <a:stretch>
+            <a:fillRect/>
+          </a:stretch>
+        </p:blipFill>
+        <p:spPr>
+          <a:xfrm>
+            <a:off x="0" y="2010092"/>
+            <a:ext cx="914400" cy="914400"/>
+          </a:xfrm>
+          <a:prstGeom prst="rect">
+            <a:avLst/>
+          </a:prstGeom>
+        </p:spPr>
+      </p:pic>
+      <p:pic>
+        <p:nvPicPr>
+          <p:cNvPr id="75" name="グラフィックス 74" descr="フリップ式カレンダー 単色塗りつぶし">
+            <a:extLst>
+              <a:ext uri="{FF2B5EF4-FFF2-40B4-BE49-F238E27FC236}">
+                <a16:creationId xmlns:a16="http://schemas.microsoft.com/office/drawing/2014/main" id="{D969DD9D-08D6-F2B5-F3E6-87518927B56C}"/>
+              </a:ext>
+            </a:extLst>
+          </p:cNvPr>
+          <p:cNvPicPr>
+            <a:picLocks noChangeAspect="1"/>
+          </p:cNvPicPr>
+          <p:nvPr/>
+        </p:nvPicPr>
+        <p:blipFill>
+          <a:blip>
+            <a:extLst>
+              <a:ext uri="{96DAC541-7B7A-43D3-8B79-37D633B846F1}">
+                <asvg:svgBlip xmlns:asvg="http://schemas.microsoft.com/office/drawing/2016/SVG/main" r:embed="rId13"/>
+              </a:ext>
+            </a:extLst>
+          </a:blip>
+          <a:stretch>
+            <a:fillRect/>
+          </a:stretch>
+        </p:blipFill>
+        <p:spPr>
+          <a:xfrm>
+            <a:off x="989806" y="2010092"/>
+            <a:ext cx="914400" cy="914400"/>
+          </a:xfrm>
+          <a:prstGeom prst="rect">
+            <a:avLst/>
+          </a:prstGeom>
+        </p:spPr>
+      </p:pic>
+      <p:pic>
+        <p:nvPicPr>
+          <p:cNvPr id="77" name="グラフィックス 76" descr="ドキュメント 単色塗りつぶし">
+            <a:extLst>
+              <a:ext uri="{FF2B5EF4-FFF2-40B4-BE49-F238E27FC236}">
+                <a16:creationId xmlns:a16="http://schemas.microsoft.com/office/drawing/2014/main" id="{CCC5DC6C-D45D-29FC-A028-315B0175B54A}"/>
+              </a:ext>
+            </a:extLst>
+          </p:cNvPr>
+          <p:cNvPicPr>
+            <a:picLocks noChangeAspect="1"/>
+          </p:cNvPicPr>
+          <p:nvPr/>
+        </p:nvPicPr>
+        <p:blipFill>
+          <a:blip>
+            <a:extLst>
+              <a:ext uri="{96DAC541-7B7A-43D3-8B79-37D633B846F1}">
+                <asvg:svgBlip xmlns:asvg="http://schemas.microsoft.com/office/drawing/2016/SVG/main" r:embed="rId14"/>
+              </a:ext>
+            </a:extLst>
+          </a:blip>
+          <a:stretch>
+            <a:fillRect/>
+          </a:stretch>
+        </p:blipFill>
+        <p:spPr>
+          <a:xfrm>
+            <a:off x="1979612" y="2010092"/>
+            <a:ext cx="914400" cy="914400"/>
+          </a:xfrm>
+          <a:prstGeom prst="rect">
+            <a:avLst/>
+          </a:prstGeom>
+        </p:spPr>
+      </p:pic>
+      <p:pic>
+        <p:nvPicPr>
+          <p:cNvPr id="79" name="グラフィックス 78" descr="時計 単色塗りつぶし">
+            <a:extLst>
+              <a:ext uri="{FF2B5EF4-FFF2-40B4-BE49-F238E27FC236}">
+                <a16:creationId xmlns:a16="http://schemas.microsoft.com/office/drawing/2014/main" id="{52C654BE-D0C0-230F-7662-5D4D1CF678C2}"/>
+              </a:ext>
+            </a:extLst>
+          </p:cNvPr>
+          <p:cNvPicPr>
+            <a:picLocks noChangeAspect="1"/>
+          </p:cNvPicPr>
+          <p:nvPr/>
+        </p:nvPicPr>
+        <p:blipFill>
+          <a:blip>
+            <a:extLst>
+              <a:ext uri="{96DAC541-7B7A-43D3-8B79-37D633B846F1}">
+                <asvg:svgBlip xmlns:asvg="http://schemas.microsoft.com/office/drawing/2016/SVG/main" r:embed="rId15"/>
+              </a:ext>
+            </a:extLst>
+          </a:blip>
+          <a:stretch>
+            <a:fillRect/>
+          </a:stretch>
+        </p:blipFill>
+        <p:spPr>
+          <a:xfrm>
+            <a:off x="2969418" y="2010092"/>
+            <a:ext cx="914400" cy="914400"/>
+          </a:xfrm>
+          <a:prstGeom prst="rect">
+            <a:avLst/>
+          </a:prstGeom>
+        </p:spPr>
+      </p:pic>
+      <p:pic>
+        <p:nvPicPr>
+          <p:cNvPr id="81" name="グラフィックス 80" descr="歯車 1 つ 単色塗りつぶし">
+            <a:extLst>
+              <a:ext uri="{FF2B5EF4-FFF2-40B4-BE49-F238E27FC236}">
+                <a16:creationId xmlns:a16="http://schemas.microsoft.com/office/drawing/2014/main" id="{B2DE912A-16F2-115F-9CA7-7ED96848975C}"/>
+              </a:ext>
+            </a:extLst>
+          </p:cNvPr>
+          <p:cNvPicPr>
+            <a:picLocks noChangeAspect="1"/>
+          </p:cNvPicPr>
+          <p:nvPr/>
+        </p:nvPicPr>
+        <p:blipFill>
+          <a:blip>
+            <a:extLst>
+              <a:ext uri="{96DAC541-7B7A-43D3-8B79-37D633B846F1}">
+                <asvg:svgBlip xmlns:asvg="http://schemas.microsoft.com/office/drawing/2016/SVG/main" r:embed="rId16"/>
+              </a:ext>
+            </a:extLst>
+          </a:blip>
+          <a:stretch>
+            <a:fillRect/>
+          </a:stretch>
+        </p:blipFill>
+        <p:spPr>
+          <a:xfrm>
+            <a:off x="3959226" y="2010092"/>
+            <a:ext cx="914400" cy="914400"/>
+          </a:xfrm>
+          <a:prstGeom prst="rect">
+            <a:avLst/>
+          </a:prstGeom>
+        </p:spPr>
+      </p:pic>
     </p:spTree>
     <p:extLst>
       <p:ext uri="{BB962C8B-B14F-4D97-AF65-F5344CB8AC3E}">
